--- a/Bondora Credit Risk – Standup 1.pptx
+++ b/Bondora Credit Risk – Standup 1.pptx
@@ -599,7 +599,7 @@
           <a:p>
             <a:r>
               <a:rPr lang="en-US" dirty="0"/>
-              <a:t>One insight to finish. About 1 in 7 loans with a known outcome is in default: 116,710 out of 836,042, so 14%. That’s a snapshot that includes loans still running, so the final default rate will likely be a bit higher; that’s why we also use the 12-month default rate. And the missing data isn’t random: 40% of loans have no risk rating and 32% have no income, mostly older loans. So when we compare default by rating or income, we’re really describing more recent lending, and we’ll say that clearly in our results. Thank you, happy to take questions.</a:t>
+              <a:t>One insight to finish. Bondora’s own risk rating works: the default rate rises step by step from 5.5% for AA, the best grade, to 26.5% for G. So a G-rated loan defaults about five times as often as an AA loan. The second point is the unrated loans: 16.7% of them default, more than the 13.7% average. So when a loan has no rating, that’s already a warning sign. We left out HR because it has only 19 loans. Next we’ll check whether income, loan amount, interest rate and duration show patterns as clear as this. Thank you, happy to take questions.</a:t>
             </a:r>
             <a:endParaRPr lang="en-US" dirty="0"/>
           </a:p>
@@ -863,7 +863,7 @@
           <a:p>
             <a:r>
               <a:rPr lang="en-US" dirty="0"/>
-              <a:t>Our main KPI is the default rate. Because young loans haven’t had time to default, we also use the 12-month default rate, only on loans that are at least 12 months old, so different years compare fairly. Then we break the default rate down by segment, which is where the actual answer to our question comes from. And we track data completeness, because some key columns have a lot of gaps.</a:t>
+              <a:t>Our main KPI is the default rate: 13.7% of the 410,865 loans have defaulted. If we leave out the cancelled loans, which can never default, it’s 14.3%. Because young loans haven’t had time to default, we also use the 12-month default rate, only on loans whose first-year outcome is known: that’s 9.1%. The default rate by segment is where the real answer comes from. We’ve done the risk rating, and it rises from 5.5% for AA to 26.5% for G. Country, income, amount, interest rate and duration are next. And we checked every column for missing values.</a:t>
             </a:r>
             <a:endParaRPr lang="en-US" dirty="0"/>
           </a:p>
@@ -951,7 +951,7 @@
           <a:p>
             <a:r>
               <a:rPr lang="en-US" dirty="0"/>
-              <a:t>Our data is Bondora’s own public loan dataset from the Go &amp; Grow statistics page. The version we’re using has 843,755 loans and 22 columns, with loans issued from 2009 up to 2026. It comes with a data dictionary sheet. We grouped the columns into borrower information, loan terms, timing, repayment, and default outcomes. The median loan is about 1,275 euros. Note: we switched to a modified version of the file yesterday, so all numbers here are from that version.</a:t>
+              <a:t>Our data is Bondora’s public loan dataset from the Go &amp; Grow statistics page: 843,755 loans and 22 columns, issued between 2009 and 2026, across 8 countries. We analyse 410,865 loans issued from 2023 to 2025. Two reasons: before 2023, income and the risk rating were simply not recorded, so we couldn’t analyse them; and loans from 2026 are too young to tell us whether they will default. The only other rows we removed were 2 loans with no income.</a:t>
             </a:r>
             <a:endParaRPr lang="en-US" dirty="0"/>
           </a:p>
@@ -1039,7 +1039,7 @@
           <a:p>
             <a:r>
               <a:rPr lang="en-US" dirty="0"/>
-              <a:t>Our pipeline has six steps. Loading and fixing data types are done: we save the data as Parquet so it reloads in seconds, and we put the risk rating in its real order from AA, the best grade, to HR, the riskiest. Cleaning is in progress. We dropped nr_of_payments because it only reflects the day the file was downloaded, and we’re deciding how to treat each kind of missing value. Next come exploration, default rates by segment, and finally recommendations.</a:t>
+              <a:t>Our pipeline has six steps, and the first three are done. We load the Excel file with pandas and save it as Parquet. We filter to loans issued 2023 to 2025, which takes us from 843,755 to 410,865 loans. Cleaning is finished: types are fixed, the risk rating is ordered from AA to HR, we dropped nr_of_payments, and every missing value is explained. We’re now on the KPIs: the default rate by rating is done, and country, income, amount, interest rate and duration are next. After that we load the clean data into a warehouse for SQL, build charts and a Tableau dashboard, try a simple model, and turn it into recommendations. Git and GitHub run through all of it.</a:t>
             </a:r>
             <a:endParaRPr lang="en-US" dirty="0"/>
           </a:p>
@@ -1127,7 +1127,7 @@
           <a:p>
             <a:r>
               <a:rPr lang="en-US" dirty="0"/>
-              <a:t>The cleaning so far shows that most missing values have a clear reason. months_in_default is empty because those loans never defaulted. The risk rating and income are missing mostly for older loans, so analysis by rating or income will describe more recent lending. The 12-month flag is empty for loans that aren’t 12 months old yet. The one open question is 7,713 loans that are missing both the default flag and all repayment data. They look like cancelled or returned loans, and we want to confirm with Waleed that we can remove them. Other things we spotted to check: an interest rate up to 264% and a few slightly negative balances.</a:t>
+              <a:t>We checked all 21 columns for missing values; 14 have none, and every gap in the other seven has a reason. Most are missing by design. months_in_default is empty because the loan never defaulted, so we added a 0/1 flag. early_repaid_at is empty when a loan wasn’t paid off early, and next_payment_date when there is no payment left to make. 13.7% of loans have no risk rating: we don’t invent one, we put them in their own “Unrated” group. The 12-month flag is empty for loans younger than 12 months; we filled it where the outcome is already known, defaulted or repaid, and left the 25,466 still-active ones out of that KPI. months_on_book is only missing for cancelled loans. Our coach advised keeping the 16,784 cancelled loans, so we kept them and flagged them. In total we removed only 2 rows.</a:t>
             </a:r>
             <a:endParaRPr lang="en-US" dirty="0"/>
           </a:p>
@@ -1303,7 +1303,7 @@
           <a:p>
             <a:r>
               <a:rPr lang="en-US" dirty="0"/>
-              <a:t>Finished: the repo with Git LFS, data loaded with the right types, a missing-value check on every column, and the documentation. Next: settle the 7,713 cancelled loans, rebuild the default flag from clean data, then default rates by segment with charts. Blockers: we both edited the same notebook and committed the Parquet file, which caused merge conflicts; the fix is to stop tracking the Parquet file and split notebook ownership. We also switched to a modified dataset mid-cleaning, so we re-checked our counts. And we’re waiting for Waleed’s sign-off on missing values. Evidence is in the notebook, the cleaning log and the commit history; I can show any of them.</a:t>
+              <a:t>Finished: we filtered the data to 2023 to 2025, explained the missing values in every column, kept the cancelled loans with a flag as our coach advised, and calculated the two main KPIs: 13.7% overall and 9.1% within 12 months. Next: default rates for the other segments, charts in seaborn and Tableau, and loading the clean data into SQL. Open questions: written-off loans count as not defaulted in Bondora’s flag, although investors lost money on them, so we want to agree whether they should count as defaults. Two date columns mix real dates with Excel date numbers, which we’re converting. And the HR rating has only 19 loans, too few to draw conclusions. The evidence is in the notebook, the cleaning log, the README and the GitHub history.</a:t>
             </a:r>
             <a:endParaRPr lang="en-US" dirty="0"/>
           </a:p>
@@ -2124,7 +2124,7 @@
                 <a:ea typeface="IBM Plex Sans" pitchFamily="34" charset="-122"/>
                 <a:cs typeface="IBM Plex Sans" pitchFamily="34" charset="-120"/>
               </a:rPr>
-              <a:t>29 October 2026</a:t>
+              <a:t>30 October 2026</a:t>
             </a:r>
             <a:endParaRPr lang="en-US" sz="1600" dirty="0"/>
           </a:p>
@@ -2210,12 +2210,14 @@
         <p:nvSpPr>
           <p:cNvPr id="3" name="Text 1"/>
           <p:cNvSpPr/>
-          <p:nvPr/>
-        </p:nvSpPr>
-        <p:spPr>
-          <a:xfrm>
-            <a:off x="812800" y="2377442"/>
-            <a:ext cx="3554925" cy="1549400"/>
+          <p:nvPr>
+            <p:ph type="title"/>
+          </p:nvPr>
+        </p:nvSpPr>
+        <p:spPr>
+          <a:xfrm>
+            <a:off x="812800" y="1153164"/>
+            <a:ext cx="10883392" cy="472440"/>
           </a:xfrm>
           <a:prstGeom prst="rect">
             <a:avLst/>
@@ -2224,29 +2226,29 @@
           <a:ln/>
         </p:spPr>
         <p:txBody>
-          <a:bodyPr wrap="none" lIns="0" tIns="0" rIns="0" bIns="0" rtlCol="0" anchor="t">
+          <a:bodyPr wrap="square" lIns="0" tIns="0" rIns="0" bIns="0" rtlCol="0" anchor="t">
             <a:normAutofit/>
           </a:bodyPr>
           <a:lstStyle/>
           <a:p>
             <a:pPr algn="l" indent="0" marL="0">
               <a:lnSpc>
-                <a:spcPts val="12000"/>
+                <a:spcPts val="3520"/>
               </a:lnSpc>
               <a:buNone/>
             </a:pPr>
             <a:r>
-              <a:rPr lang="en-US" sz="12000" b="1" dirty="0">
-                <a:solidFill>
-                  <a:srgbClr val="F2A65A"/>
+              <a:rPr lang="en-US" sz="3200" b="1" i="0" dirty="0">
+                <a:solidFill>
+                  <a:srgbClr val="F6F4EE"/>
                 </a:solidFill>
                 <a:latin typeface="Source Serif 4" pitchFamily="18" charset="0"/>
                 <a:ea typeface="Source Serif 4" pitchFamily="18" charset="-122"/>
                 <a:cs typeface="Source Serif 4" pitchFamily="18" charset="-120"/>
               </a:rPr>
-              <a:t>1 in 7</a:t>
-            </a:r>
-            <a:endParaRPr lang="en-US" sz="12000" dirty="0"/>
+              <a:t>The worse the rating, the more loans default</a:t>
+            </a:r>
+            <a:endParaRPr lang="en-US" sz="3200" dirty="0"/>
           </a:p>
         </p:txBody>
       </p:sp>
@@ -2258,8 +2260,8 @@
         </p:nvSpPr>
         <p:spPr>
           <a:xfrm>
-            <a:off x="4873784" y="2494279"/>
-            <a:ext cx="6700579" cy="878840"/>
+            <a:off x="812800" y="1879600"/>
+            <a:ext cx="876300" cy="256540"/>
           </a:xfrm>
           <a:prstGeom prst="rect">
             <a:avLst/>
@@ -2275,35 +2277,1025 @@
           <a:p>
             <a:pPr algn="l" indent="0" marL="0">
               <a:lnSpc>
-                <a:spcPts val="3360"/>
+                <a:spcPts val="1820"/>
               </a:lnSpc>
               <a:buNone/>
             </a:pPr>
             <a:r>
-              <a:rPr lang="en-US" sz="2800" dirty="0">
+              <a:rPr lang="en-US" sz="1300" dirty="0">
+                <a:solidFill>
+                  <a:srgbClr val="D5DBE7"/>
+                </a:solidFill>
+                <a:latin typeface="IBM Plex Sans" pitchFamily="34" charset="0"/>
+                <a:ea typeface="IBM Plex Sans" pitchFamily="34" charset="-122"/>
+                <a:cs typeface="IBM Plex Sans" pitchFamily="34" charset="-120"/>
+              </a:rPr>
+              <a:t>AA</a:t>
+            </a:r>
+            <a:endParaRPr lang="en-US" sz="1300" dirty="0"/>
+          </a:p>
+        </p:txBody>
+      </p:sp>
+      <p:sp>
+        <p:nvSpPr>
+          <p:cNvPr id="5" name="Shape 3"/>
+          <p:cNvSpPr/>
+          <p:nvPr/>
+        </p:nvSpPr>
+        <p:spPr>
+          <a:xfrm>
+            <a:off x="1790700" y="1887221"/>
+            <a:ext cx="1003300" cy="215900"/>
+          </a:xfrm>
+          <a:prstGeom prst="roundRect">
+            <a:avLst>
+              <a:gd name="adj" fmla="val 11765"/>
+            </a:avLst>
+          </a:prstGeom>
+          <a:solidFill>
+            <a:srgbClr val="F2A65A"/>
+          </a:solidFill>
+          <a:ln/>
+        </p:spPr>
+      </p:sp>
+      <p:sp>
+        <p:nvSpPr>
+          <p:cNvPr id="6" name="Text 4"/>
+          <p:cNvSpPr/>
+          <p:nvPr/>
+        </p:nvSpPr>
+        <p:spPr>
+          <a:xfrm>
+            <a:off x="2946400" y="1879600"/>
+            <a:ext cx="475298" cy="256540"/>
+          </a:xfrm>
+          <a:prstGeom prst="rect">
+            <a:avLst/>
+          </a:prstGeom>
+          <a:noFill/>
+          <a:ln/>
+        </p:spPr>
+        <p:txBody>
+          <a:bodyPr wrap="square" lIns="0" tIns="0" rIns="0" bIns="0" rtlCol="0" anchor="t">
+            <a:normAutofit/>
+          </a:bodyPr>
+          <a:lstStyle/>
+          <a:p>
+            <a:pPr algn="l" indent="0" marL="0">
+              <a:lnSpc>
+                <a:spcPts val="1820"/>
+              </a:lnSpc>
+              <a:buNone/>
+            </a:pPr>
+            <a:r>
+              <a:rPr lang="en-US" sz="1300" dirty="0">
                 <a:solidFill>
                   <a:srgbClr val="F6F4EE"/>
+                </a:solidFill>
+                <a:latin typeface="IBM Plex Sans" pitchFamily="34" charset="0"/>
+                <a:ea typeface="IBM Plex Sans" pitchFamily="34" charset="-122"/>
+                <a:cs typeface="IBM Plex Sans" pitchFamily="34" charset="-120"/>
+              </a:rPr>
+              <a:t>5.5%</a:t>
+            </a:r>
+            <a:endParaRPr lang="en-US" sz="1300" dirty="0"/>
+          </a:p>
+        </p:txBody>
+      </p:sp>
+      <p:sp>
+        <p:nvSpPr>
+          <p:cNvPr id="7" name="Text 5"/>
+          <p:cNvSpPr/>
+          <p:nvPr/>
+        </p:nvSpPr>
+        <p:spPr>
+          <a:xfrm>
+            <a:off x="812800" y="2174242"/>
+            <a:ext cx="876300" cy="256540"/>
+          </a:xfrm>
+          <a:prstGeom prst="rect">
+            <a:avLst/>
+          </a:prstGeom>
+          <a:noFill/>
+          <a:ln/>
+        </p:spPr>
+        <p:txBody>
+          <a:bodyPr wrap="square" lIns="0" tIns="0" rIns="0" bIns="0" rtlCol="0" anchor="t">
+            <a:normAutofit/>
+          </a:bodyPr>
+          <a:lstStyle/>
+          <a:p>
+            <a:pPr algn="l" indent="0" marL="0">
+              <a:lnSpc>
+                <a:spcPts val="1820"/>
+              </a:lnSpc>
+              <a:buNone/>
+            </a:pPr>
+            <a:r>
+              <a:rPr lang="en-US" sz="1300" dirty="0">
+                <a:solidFill>
+                  <a:srgbClr val="D5DBE7"/>
+                </a:solidFill>
+                <a:latin typeface="IBM Plex Sans" pitchFamily="34" charset="0"/>
+                <a:ea typeface="IBM Plex Sans" pitchFamily="34" charset="-122"/>
+                <a:cs typeface="IBM Plex Sans" pitchFamily="34" charset="-120"/>
+              </a:rPr>
+              <a:t>A</a:t>
+            </a:r>
+            <a:endParaRPr lang="en-US" sz="1300" dirty="0"/>
+          </a:p>
+        </p:txBody>
+      </p:sp>
+      <p:sp>
+        <p:nvSpPr>
+          <p:cNvPr id="8" name="Shape 6"/>
+          <p:cNvSpPr/>
+          <p:nvPr/>
+        </p:nvSpPr>
+        <p:spPr>
+          <a:xfrm>
+            <a:off x="1790700" y="2181864"/>
+            <a:ext cx="1841500" cy="215900"/>
+          </a:xfrm>
+          <a:prstGeom prst="roundRect">
+            <a:avLst>
+              <a:gd name="adj" fmla="val 11765"/>
+            </a:avLst>
+          </a:prstGeom>
+          <a:solidFill>
+            <a:srgbClr val="F2A65A"/>
+          </a:solidFill>
+          <a:ln/>
+        </p:spPr>
+      </p:sp>
+      <p:sp>
+        <p:nvSpPr>
+          <p:cNvPr id="9" name="Text 7"/>
+          <p:cNvSpPr/>
+          <p:nvPr/>
+        </p:nvSpPr>
+        <p:spPr>
+          <a:xfrm>
+            <a:off x="3784600" y="2174242"/>
+            <a:ext cx="594169" cy="256540"/>
+          </a:xfrm>
+          <a:prstGeom prst="rect">
+            <a:avLst/>
+          </a:prstGeom>
+          <a:noFill/>
+          <a:ln/>
+        </p:spPr>
+        <p:txBody>
+          <a:bodyPr wrap="square" lIns="0" tIns="0" rIns="0" bIns="0" rtlCol="0" anchor="t">
+            <a:normAutofit/>
+          </a:bodyPr>
+          <a:lstStyle/>
+          <a:p>
+            <a:pPr algn="l" indent="0" marL="0">
+              <a:lnSpc>
+                <a:spcPts val="1820"/>
+              </a:lnSpc>
+              <a:buNone/>
+            </a:pPr>
+            <a:r>
+              <a:rPr lang="en-US" sz="1300" dirty="0">
+                <a:solidFill>
+                  <a:srgbClr val="F6F4EE"/>
+                </a:solidFill>
+                <a:latin typeface="IBM Plex Sans" pitchFamily="34" charset="0"/>
+                <a:ea typeface="IBM Plex Sans" pitchFamily="34" charset="-122"/>
+                <a:cs typeface="IBM Plex Sans" pitchFamily="34" charset="-120"/>
+              </a:rPr>
+              <a:t>10.1%</a:t>
+            </a:r>
+            <a:endParaRPr lang="en-US" sz="1300" dirty="0"/>
+          </a:p>
+        </p:txBody>
+      </p:sp>
+      <p:sp>
+        <p:nvSpPr>
+          <p:cNvPr id="10" name="Text 8"/>
+          <p:cNvSpPr/>
+          <p:nvPr/>
+        </p:nvSpPr>
+        <p:spPr>
+          <a:xfrm>
+            <a:off x="812800" y="2468879"/>
+            <a:ext cx="876300" cy="256540"/>
+          </a:xfrm>
+          <a:prstGeom prst="rect">
+            <a:avLst/>
+          </a:prstGeom>
+          <a:noFill/>
+          <a:ln/>
+        </p:spPr>
+        <p:txBody>
+          <a:bodyPr wrap="square" lIns="0" tIns="0" rIns="0" bIns="0" rtlCol="0" anchor="t">
+            <a:normAutofit/>
+          </a:bodyPr>
+          <a:lstStyle/>
+          <a:p>
+            <a:pPr algn="l" indent="0" marL="0">
+              <a:lnSpc>
+                <a:spcPts val="1820"/>
+              </a:lnSpc>
+              <a:buNone/>
+            </a:pPr>
+            <a:r>
+              <a:rPr lang="en-US" sz="1300" dirty="0">
+                <a:solidFill>
+                  <a:srgbClr val="D5DBE7"/>
+                </a:solidFill>
+                <a:latin typeface="IBM Plex Sans" pitchFamily="34" charset="0"/>
+                <a:ea typeface="IBM Plex Sans" pitchFamily="34" charset="-122"/>
+                <a:cs typeface="IBM Plex Sans" pitchFamily="34" charset="-120"/>
+              </a:rPr>
+              <a:t>B</a:t>
+            </a:r>
+            <a:endParaRPr lang="en-US" sz="1300" dirty="0"/>
+          </a:p>
+        </p:txBody>
+      </p:sp>
+      <p:sp>
+        <p:nvSpPr>
+          <p:cNvPr id="11" name="Shape 9"/>
+          <p:cNvSpPr/>
+          <p:nvPr/>
+        </p:nvSpPr>
+        <p:spPr>
+          <a:xfrm>
+            <a:off x="1790700" y="2476500"/>
+            <a:ext cx="2495550" cy="215900"/>
+          </a:xfrm>
+          <a:prstGeom prst="roundRect">
+            <a:avLst>
+              <a:gd name="adj" fmla="val 11765"/>
+            </a:avLst>
+          </a:prstGeom>
+          <a:solidFill>
+            <a:srgbClr val="F2A65A"/>
+          </a:solidFill>
+          <a:ln/>
+        </p:spPr>
+      </p:sp>
+      <p:sp>
+        <p:nvSpPr>
+          <p:cNvPr id="12" name="Text 10"/>
+          <p:cNvSpPr/>
+          <p:nvPr/>
+        </p:nvSpPr>
+        <p:spPr>
+          <a:xfrm>
+            <a:off x="4438650" y="2468879"/>
+            <a:ext cx="594169" cy="256540"/>
+          </a:xfrm>
+          <a:prstGeom prst="rect">
+            <a:avLst/>
+          </a:prstGeom>
+          <a:noFill/>
+          <a:ln/>
+        </p:spPr>
+        <p:txBody>
+          <a:bodyPr wrap="square" lIns="0" tIns="0" rIns="0" bIns="0" rtlCol="0" anchor="t">
+            <a:normAutofit/>
+          </a:bodyPr>
+          <a:lstStyle/>
+          <a:p>
+            <a:pPr algn="l" indent="0" marL="0">
+              <a:lnSpc>
+                <a:spcPts val="1820"/>
+              </a:lnSpc>
+              <a:buNone/>
+            </a:pPr>
+            <a:r>
+              <a:rPr lang="en-US" sz="1300" dirty="0">
+                <a:solidFill>
+                  <a:srgbClr val="F6F4EE"/>
+                </a:solidFill>
+                <a:latin typeface="IBM Plex Sans" pitchFamily="34" charset="0"/>
+                <a:ea typeface="IBM Plex Sans" pitchFamily="34" charset="-122"/>
+                <a:cs typeface="IBM Plex Sans" pitchFamily="34" charset="-120"/>
+              </a:rPr>
+              <a:t>13.7%</a:t>
+            </a:r>
+            <a:endParaRPr lang="en-US" sz="1300" dirty="0"/>
+          </a:p>
+        </p:txBody>
+      </p:sp>
+      <p:sp>
+        <p:nvSpPr>
+          <p:cNvPr id="13" name="Text 11"/>
+          <p:cNvSpPr/>
+          <p:nvPr/>
+        </p:nvSpPr>
+        <p:spPr>
+          <a:xfrm>
+            <a:off x="812800" y="2763521"/>
+            <a:ext cx="876300" cy="256540"/>
+          </a:xfrm>
+          <a:prstGeom prst="rect">
+            <a:avLst/>
+          </a:prstGeom>
+          <a:noFill/>
+          <a:ln/>
+        </p:spPr>
+        <p:txBody>
+          <a:bodyPr wrap="square" lIns="0" tIns="0" rIns="0" bIns="0" rtlCol="0" anchor="t">
+            <a:normAutofit/>
+          </a:bodyPr>
+          <a:lstStyle/>
+          <a:p>
+            <a:pPr algn="l" indent="0" marL="0">
+              <a:lnSpc>
+                <a:spcPts val="1820"/>
+              </a:lnSpc>
+              <a:buNone/>
+            </a:pPr>
+            <a:r>
+              <a:rPr lang="en-US" sz="1300" dirty="0">
+                <a:solidFill>
+                  <a:srgbClr val="D5DBE7"/>
+                </a:solidFill>
+                <a:latin typeface="IBM Plex Sans" pitchFamily="34" charset="0"/>
+                <a:ea typeface="IBM Plex Sans" pitchFamily="34" charset="-122"/>
+                <a:cs typeface="IBM Plex Sans" pitchFamily="34" charset="-120"/>
+              </a:rPr>
+              <a:t>C</a:t>
+            </a:r>
+            <a:endParaRPr lang="en-US" sz="1300" dirty="0"/>
+          </a:p>
+        </p:txBody>
+      </p:sp>
+      <p:sp>
+        <p:nvSpPr>
+          <p:cNvPr id="14" name="Shape 12"/>
+          <p:cNvSpPr/>
+          <p:nvPr/>
+        </p:nvSpPr>
+        <p:spPr>
+          <a:xfrm>
+            <a:off x="1790700" y="2771142"/>
+            <a:ext cx="3136900" cy="215900"/>
+          </a:xfrm>
+          <a:prstGeom prst="roundRect">
+            <a:avLst>
+              <a:gd name="adj" fmla="val 11765"/>
+            </a:avLst>
+          </a:prstGeom>
+          <a:solidFill>
+            <a:srgbClr val="F2A65A"/>
+          </a:solidFill>
+          <a:ln/>
+        </p:spPr>
+      </p:sp>
+      <p:sp>
+        <p:nvSpPr>
+          <p:cNvPr id="15" name="Text 13"/>
+          <p:cNvSpPr/>
+          <p:nvPr/>
+        </p:nvSpPr>
+        <p:spPr>
+          <a:xfrm>
+            <a:off x="5080000" y="2763521"/>
+            <a:ext cx="594169" cy="256540"/>
+          </a:xfrm>
+          <a:prstGeom prst="rect">
+            <a:avLst/>
+          </a:prstGeom>
+          <a:noFill/>
+          <a:ln/>
+        </p:spPr>
+        <p:txBody>
+          <a:bodyPr wrap="square" lIns="0" tIns="0" rIns="0" bIns="0" rtlCol="0" anchor="t">
+            <a:normAutofit/>
+          </a:bodyPr>
+          <a:lstStyle/>
+          <a:p>
+            <a:pPr algn="l" indent="0" marL="0">
+              <a:lnSpc>
+                <a:spcPts val="1820"/>
+              </a:lnSpc>
+              <a:buNone/>
+            </a:pPr>
+            <a:r>
+              <a:rPr lang="en-US" sz="1300" dirty="0">
+                <a:solidFill>
+                  <a:srgbClr val="F6F4EE"/>
+                </a:solidFill>
+                <a:latin typeface="IBM Plex Sans" pitchFamily="34" charset="0"/>
+                <a:ea typeface="IBM Plex Sans" pitchFamily="34" charset="-122"/>
+                <a:cs typeface="IBM Plex Sans" pitchFamily="34" charset="-120"/>
+              </a:rPr>
+              <a:t>17.2%</a:t>
+            </a:r>
+            <a:endParaRPr lang="en-US" sz="1300" dirty="0"/>
+          </a:p>
+        </p:txBody>
+      </p:sp>
+      <p:sp>
+        <p:nvSpPr>
+          <p:cNvPr id="16" name="Text 14"/>
+          <p:cNvSpPr/>
+          <p:nvPr/>
+        </p:nvSpPr>
+        <p:spPr>
+          <a:xfrm>
+            <a:off x="812800" y="3058164"/>
+            <a:ext cx="876300" cy="256540"/>
+          </a:xfrm>
+          <a:prstGeom prst="rect">
+            <a:avLst/>
+          </a:prstGeom>
+          <a:noFill/>
+          <a:ln/>
+        </p:spPr>
+        <p:txBody>
+          <a:bodyPr wrap="square" lIns="0" tIns="0" rIns="0" bIns="0" rtlCol="0" anchor="t">
+            <a:normAutofit/>
+          </a:bodyPr>
+          <a:lstStyle/>
+          <a:p>
+            <a:pPr algn="l" indent="0" marL="0">
+              <a:lnSpc>
+                <a:spcPts val="1820"/>
+              </a:lnSpc>
+              <a:buNone/>
+            </a:pPr>
+            <a:r>
+              <a:rPr lang="en-US" sz="1300" dirty="0">
+                <a:solidFill>
+                  <a:srgbClr val="D5DBE7"/>
+                </a:solidFill>
+                <a:latin typeface="IBM Plex Sans" pitchFamily="34" charset="0"/>
+                <a:ea typeface="IBM Plex Sans" pitchFamily="34" charset="-122"/>
+                <a:cs typeface="IBM Plex Sans" pitchFamily="34" charset="-120"/>
+              </a:rPr>
+              <a:t>D</a:t>
+            </a:r>
+            <a:endParaRPr lang="en-US" sz="1300" dirty="0"/>
+          </a:p>
+        </p:txBody>
+      </p:sp>
+      <p:sp>
+        <p:nvSpPr>
+          <p:cNvPr id="17" name="Shape 15"/>
+          <p:cNvSpPr/>
+          <p:nvPr/>
+        </p:nvSpPr>
+        <p:spPr>
+          <a:xfrm>
+            <a:off x="1790700" y="3065779"/>
+            <a:ext cx="3790950" cy="215900"/>
+          </a:xfrm>
+          <a:prstGeom prst="roundRect">
+            <a:avLst>
+              <a:gd name="adj" fmla="val 11765"/>
+            </a:avLst>
+          </a:prstGeom>
+          <a:solidFill>
+            <a:srgbClr val="F2A65A"/>
+          </a:solidFill>
+          <a:ln/>
+        </p:spPr>
+      </p:sp>
+      <p:sp>
+        <p:nvSpPr>
+          <p:cNvPr id="18" name="Text 16"/>
+          <p:cNvSpPr/>
+          <p:nvPr/>
+        </p:nvSpPr>
+        <p:spPr>
+          <a:xfrm>
+            <a:off x="5734050" y="3058164"/>
+            <a:ext cx="594169" cy="256540"/>
+          </a:xfrm>
+          <a:prstGeom prst="rect">
+            <a:avLst/>
+          </a:prstGeom>
+          <a:noFill/>
+          <a:ln/>
+        </p:spPr>
+        <p:txBody>
+          <a:bodyPr wrap="square" lIns="0" tIns="0" rIns="0" bIns="0" rtlCol="0" anchor="t">
+            <a:normAutofit/>
+          </a:bodyPr>
+          <a:lstStyle/>
+          <a:p>
+            <a:pPr algn="l" indent="0" marL="0">
+              <a:lnSpc>
+                <a:spcPts val="1820"/>
+              </a:lnSpc>
+              <a:buNone/>
+            </a:pPr>
+            <a:r>
+              <a:rPr lang="en-US" sz="1300" dirty="0">
+                <a:solidFill>
+                  <a:srgbClr val="F6F4EE"/>
+                </a:solidFill>
+                <a:latin typeface="IBM Plex Sans" pitchFamily="34" charset="0"/>
+                <a:ea typeface="IBM Plex Sans" pitchFamily="34" charset="-122"/>
+                <a:cs typeface="IBM Plex Sans" pitchFamily="34" charset="-120"/>
+              </a:rPr>
+              <a:t>20.8%</a:t>
+            </a:r>
+            <a:endParaRPr lang="en-US" sz="1300" dirty="0"/>
+          </a:p>
+        </p:txBody>
+      </p:sp>
+      <p:sp>
+        <p:nvSpPr>
+          <p:cNvPr id="19" name="Text 17"/>
+          <p:cNvSpPr/>
+          <p:nvPr/>
+        </p:nvSpPr>
+        <p:spPr>
+          <a:xfrm>
+            <a:off x="812800" y="3352800"/>
+            <a:ext cx="876300" cy="256540"/>
+          </a:xfrm>
+          <a:prstGeom prst="rect">
+            <a:avLst/>
+          </a:prstGeom>
+          <a:noFill/>
+          <a:ln/>
+        </p:spPr>
+        <p:txBody>
+          <a:bodyPr wrap="square" lIns="0" tIns="0" rIns="0" bIns="0" rtlCol="0" anchor="t">
+            <a:normAutofit/>
+          </a:bodyPr>
+          <a:lstStyle/>
+          <a:p>
+            <a:pPr algn="l" indent="0" marL="0">
+              <a:lnSpc>
+                <a:spcPts val="1820"/>
+              </a:lnSpc>
+              <a:buNone/>
+            </a:pPr>
+            <a:r>
+              <a:rPr lang="en-US" sz="1300" dirty="0">
+                <a:solidFill>
+                  <a:srgbClr val="D5DBE7"/>
+                </a:solidFill>
+                <a:latin typeface="IBM Plex Sans" pitchFamily="34" charset="0"/>
+                <a:ea typeface="IBM Plex Sans" pitchFamily="34" charset="-122"/>
+                <a:cs typeface="IBM Plex Sans" pitchFamily="34" charset="-120"/>
+              </a:rPr>
+              <a:t>E</a:t>
+            </a:r>
+            <a:endParaRPr lang="en-US" sz="1300" dirty="0"/>
+          </a:p>
+        </p:txBody>
+      </p:sp>
+      <p:sp>
+        <p:nvSpPr>
+          <p:cNvPr id="20" name="Shape 18"/>
+          <p:cNvSpPr/>
+          <p:nvPr/>
+        </p:nvSpPr>
+        <p:spPr>
+          <a:xfrm>
+            <a:off x="1790700" y="3360421"/>
+            <a:ext cx="4102100" cy="215900"/>
+          </a:xfrm>
+          <a:prstGeom prst="roundRect">
+            <a:avLst>
+              <a:gd name="adj" fmla="val 11765"/>
+            </a:avLst>
+          </a:prstGeom>
+          <a:solidFill>
+            <a:srgbClr val="F2A65A"/>
+          </a:solidFill>
+          <a:ln/>
+        </p:spPr>
+      </p:sp>
+      <p:sp>
+        <p:nvSpPr>
+          <p:cNvPr id="21" name="Text 19"/>
+          <p:cNvSpPr/>
+          <p:nvPr/>
+        </p:nvSpPr>
+        <p:spPr>
+          <a:xfrm>
+            <a:off x="6045200" y="3352800"/>
+            <a:ext cx="594169" cy="256540"/>
+          </a:xfrm>
+          <a:prstGeom prst="rect">
+            <a:avLst/>
+          </a:prstGeom>
+          <a:noFill/>
+          <a:ln/>
+        </p:spPr>
+        <p:txBody>
+          <a:bodyPr wrap="square" lIns="0" tIns="0" rIns="0" bIns="0" rtlCol="0" anchor="t">
+            <a:normAutofit/>
+          </a:bodyPr>
+          <a:lstStyle/>
+          <a:p>
+            <a:pPr algn="l" indent="0" marL="0">
+              <a:lnSpc>
+                <a:spcPts val="1820"/>
+              </a:lnSpc>
+              <a:buNone/>
+            </a:pPr>
+            <a:r>
+              <a:rPr lang="en-US" sz="1300" dirty="0">
+                <a:solidFill>
+                  <a:srgbClr val="F6F4EE"/>
+                </a:solidFill>
+                <a:latin typeface="IBM Plex Sans" pitchFamily="34" charset="0"/>
+                <a:ea typeface="IBM Plex Sans" pitchFamily="34" charset="-122"/>
+                <a:cs typeface="IBM Plex Sans" pitchFamily="34" charset="-120"/>
+              </a:rPr>
+              <a:t>22.5%</a:t>
+            </a:r>
+            <a:endParaRPr lang="en-US" sz="1300" dirty="0"/>
+          </a:p>
+        </p:txBody>
+      </p:sp>
+      <p:sp>
+        <p:nvSpPr>
+          <p:cNvPr id="22" name="Text 20"/>
+          <p:cNvSpPr/>
+          <p:nvPr/>
+        </p:nvSpPr>
+        <p:spPr>
+          <a:xfrm>
+            <a:off x="812800" y="3647442"/>
+            <a:ext cx="876300" cy="256540"/>
+          </a:xfrm>
+          <a:prstGeom prst="rect">
+            <a:avLst/>
+          </a:prstGeom>
+          <a:noFill/>
+          <a:ln/>
+        </p:spPr>
+        <p:txBody>
+          <a:bodyPr wrap="square" lIns="0" tIns="0" rIns="0" bIns="0" rtlCol="0" anchor="t">
+            <a:normAutofit/>
+          </a:bodyPr>
+          <a:lstStyle/>
+          <a:p>
+            <a:pPr algn="l" indent="0" marL="0">
+              <a:lnSpc>
+                <a:spcPts val="1820"/>
+              </a:lnSpc>
+              <a:buNone/>
+            </a:pPr>
+            <a:r>
+              <a:rPr lang="en-US" sz="1300" dirty="0">
+                <a:solidFill>
+                  <a:srgbClr val="D5DBE7"/>
+                </a:solidFill>
+                <a:latin typeface="IBM Plex Sans" pitchFamily="34" charset="0"/>
+                <a:ea typeface="IBM Plex Sans" pitchFamily="34" charset="-122"/>
+                <a:cs typeface="IBM Plex Sans" pitchFamily="34" charset="-120"/>
+              </a:rPr>
+              <a:t>F</a:t>
+            </a:r>
+            <a:endParaRPr lang="en-US" sz="1300" dirty="0"/>
+          </a:p>
+        </p:txBody>
+      </p:sp>
+      <p:sp>
+        <p:nvSpPr>
+          <p:cNvPr id="23" name="Shape 21"/>
+          <p:cNvSpPr/>
+          <p:nvPr/>
+        </p:nvSpPr>
+        <p:spPr>
+          <a:xfrm>
+            <a:off x="1790700" y="3655064"/>
+            <a:ext cx="4648200" cy="215900"/>
+          </a:xfrm>
+          <a:prstGeom prst="roundRect">
+            <a:avLst>
+              <a:gd name="adj" fmla="val 11765"/>
+            </a:avLst>
+          </a:prstGeom>
+          <a:solidFill>
+            <a:srgbClr val="F2A65A"/>
+          </a:solidFill>
+          <a:ln/>
+        </p:spPr>
+      </p:sp>
+      <p:sp>
+        <p:nvSpPr>
+          <p:cNvPr id="24" name="Text 22"/>
+          <p:cNvSpPr/>
+          <p:nvPr/>
+        </p:nvSpPr>
+        <p:spPr>
+          <a:xfrm>
+            <a:off x="6591300" y="3647442"/>
+            <a:ext cx="594169" cy="256540"/>
+          </a:xfrm>
+          <a:prstGeom prst="rect">
+            <a:avLst/>
+          </a:prstGeom>
+          <a:noFill/>
+          <a:ln/>
+        </p:spPr>
+        <p:txBody>
+          <a:bodyPr wrap="square" lIns="0" tIns="0" rIns="0" bIns="0" rtlCol="0" anchor="t">
+            <a:normAutofit/>
+          </a:bodyPr>
+          <a:lstStyle/>
+          <a:p>
+            <a:pPr algn="l" indent="0" marL="0">
+              <a:lnSpc>
+                <a:spcPts val="1820"/>
+              </a:lnSpc>
+              <a:buNone/>
+            </a:pPr>
+            <a:r>
+              <a:rPr lang="en-US" sz="1300" dirty="0">
+                <a:solidFill>
+                  <a:srgbClr val="F6F4EE"/>
+                </a:solidFill>
+                <a:latin typeface="IBM Plex Sans" pitchFamily="34" charset="0"/>
+                <a:ea typeface="IBM Plex Sans" pitchFamily="34" charset="-122"/>
+                <a:cs typeface="IBM Plex Sans" pitchFamily="34" charset="-120"/>
+              </a:rPr>
+              <a:t>25.5%</a:t>
+            </a:r>
+            <a:endParaRPr lang="en-US" sz="1300" dirty="0"/>
+          </a:p>
+        </p:txBody>
+      </p:sp>
+      <p:sp>
+        <p:nvSpPr>
+          <p:cNvPr id="25" name="Text 23"/>
+          <p:cNvSpPr/>
+          <p:nvPr/>
+        </p:nvSpPr>
+        <p:spPr>
+          <a:xfrm>
+            <a:off x="812800" y="3942079"/>
+            <a:ext cx="876300" cy="256540"/>
+          </a:xfrm>
+          <a:prstGeom prst="rect">
+            <a:avLst/>
+          </a:prstGeom>
+          <a:noFill/>
+          <a:ln/>
+        </p:spPr>
+        <p:txBody>
+          <a:bodyPr wrap="square" lIns="0" tIns="0" rIns="0" bIns="0" rtlCol="0" anchor="t">
+            <a:normAutofit/>
+          </a:bodyPr>
+          <a:lstStyle/>
+          <a:p>
+            <a:pPr algn="l" indent="0" marL="0">
+              <a:lnSpc>
+                <a:spcPts val="1820"/>
+              </a:lnSpc>
+              <a:buNone/>
+            </a:pPr>
+            <a:r>
+              <a:rPr lang="en-US" sz="1300" dirty="0">
+                <a:solidFill>
+                  <a:srgbClr val="D5DBE7"/>
+                </a:solidFill>
+                <a:latin typeface="IBM Plex Sans" pitchFamily="34" charset="0"/>
+                <a:ea typeface="IBM Plex Sans" pitchFamily="34" charset="-122"/>
+                <a:cs typeface="IBM Plex Sans" pitchFamily="34" charset="-120"/>
+              </a:rPr>
+              <a:t>G</a:t>
+            </a:r>
+            <a:endParaRPr lang="en-US" sz="1300" dirty="0"/>
+          </a:p>
+        </p:txBody>
+      </p:sp>
+      <p:sp>
+        <p:nvSpPr>
+          <p:cNvPr id="26" name="Shape 24"/>
+          <p:cNvSpPr/>
+          <p:nvPr/>
+        </p:nvSpPr>
+        <p:spPr>
+          <a:xfrm>
+            <a:off x="1790700" y="3949700"/>
+            <a:ext cx="4826000" cy="215900"/>
+          </a:xfrm>
+          <a:prstGeom prst="roundRect">
+            <a:avLst>
+              <a:gd name="adj" fmla="val 11765"/>
+            </a:avLst>
+          </a:prstGeom>
+          <a:solidFill>
+            <a:srgbClr val="F2A65A"/>
+          </a:solidFill>
+          <a:ln/>
+        </p:spPr>
+      </p:sp>
+      <p:sp>
+        <p:nvSpPr>
+          <p:cNvPr id="27" name="Text 25"/>
+          <p:cNvSpPr/>
+          <p:nvPr/>
+        </p:nvSpPr>
+        <p:spPr>
+          <a:xfrm>
+            <a:off x="6769100" y="3942079"/>
+            <a:ext cx="594169" cy="256540"/>
+          </a:xfrm>
+          <a:prstGeom prst="rect">
+            <a:avLst/>
+          </a:prstGeom>
+          <a:noFill/>
+          <a:ln/>
+        </p:spPr>
+        <p:txBody>
+          <a:bodyPr wrap="square" lIns="0" tIns="0" rIns="0" bIns="0" rtlCol="0" anchor="t">
+            <a:normAutofit/>
+          </a:bodyPr>
+          <a:lstStyle/>
+          <a:p>
+            <a:pPr algn="l" indent="0" marL="0">
+              <a:lnSpc>
+                <a:spcPts val="1820"/>
+              </a:lnSpc>
+              <a:buNone/>
+            </a:pPr>
+            <a:r>
+              <a:rPr lang="en-US" sz="1300" dirty="0">
+                <a:solidFill>
+                  <a:srgbClr val="F6F4EE"/>
+                </a:solidFill>
+                <a:latin typeface="IBM Plex Sans" pitchFamily="34" charset="0"/>
+                <a:ea typeface="IBM Plex Sans" pitchFamily="34" charset="-122"/>
+                <a:cs typeface="IBM Plex Sans" pitchFamily="34" charset="-120"/>
+              </a:rPr>
+              <a:t>26.5%</a:t>
+            </a:r>
+            <a:endParaRPr lang="en-US" sz="1300" dirty="0"/>
+          </a:p>
+        </p:txBody>
+      </p:sp>
+      <p:sp>
+        <p:nvSpPr>
+          <p:cNvPr id="28" name="Text 26"/>
+          <p:cNvSpPr/>
+          <p:nvPr/>
+        </p:nvSpPr>
+        <p:spPr>
+          <a:xfrm>
+            <a:off x="812800" y="4236721"/>
+            <a:ext cx="876300" cy="256540"/>
+          </a:xfrm>
+          <a:prstGeom prst="rect">
+            <a:avLst/>
+          </a:prstGeom>
+          <a:noFill/>
+          <a:ln/>
+        </p:spPr>
+        <p:txBody>
+          <a:bodyPr wrap="square" lIns="0" tIns="0" rIns="0" bIns="0" rtlCol="0" anchor="t">
+            <a:normAutofit/>
+          </a:bodyPr>
+          <a:lstStyle/>
+          <a:p>
+            <a:pPr algn="l" indent="0" marL="0">
+              <a:lnSpc>
+                <a:spcPts val="1820"/>
+              </a:lnSpc>
+              <a:buNone/>
+            </a:pPr>
+            <a:r>
+              <a:rPr lang="en-US" sz="1300" dirty="0">
+                <a:solidFill>
+                  <a:srgbClr val="D5DBE7"/>
+                </a:solidFill>
+                <a:latin typeface="IBM Plex Sans" pitchFamily="34" charset="0"/>
+                <a:ea typeface="IBM Plex Sans" pitchFamily="34" charset="-122"/>
+                <a:cs typeface="IBM Plex Sans" pitchFamily="34" charset="-120"/>
+              </a:rPr>
+              <a:t>Unrated</a:t>
+            </a:r>
+            <a:endParaRPr lang="en-US" sz="1300" dirty="0"/>
+          </a:p>
+        </p:txBody>
+      </p:sp>
+      <p:sp>
+        <p:nvSpPr>
+          <p:cNvPr id="29" name="Shape 27"/>
+          <p:cNvSpPr/>
+          <p:nvPr/>
+        </p:nvSpPr>
+        <p:spPr>
+          <a:xfrm>
+            <a:off x="1790700" y="4244342"/>
+            <a:ext cx="3041650" cy="215900"/>
+          </a:xfrm>
+          <a:prstGeom prst="roundRect">
+            <a:avLst>
+              <a:gd name="adj" fmla="val 11765"/>
+            </a:avLst>
+          </a:prstGeom>
+          <a:solidFill>
+            <a:srgbClr val="B9C2D6"/>
+          </a:solidFill>
+          <a:ln/>
+        </p:spPr>
+      </p:sp>
+      <p:sp>
+        <p:nvSpPr>
+          <p:cNvPr id="30" name="Text 28"/>
+          <p:cNvSpPr/>
+          <p:nvPr/>
+        </p:nvSpPr>
+        <p:spPr>
+          <a:xfrm>
+            <a:off x="4984750" y="4236721"/>
+            <a:ext cx="594169" cy="256540"/>
+          </a:xfrm>
+          <a:prstGeom prst="rect">
+            <a:avLst/>
+          </a:prstGeom>
+          <a:noFill/>
+          <a:ln/>
+        </p:spPr>
+        <p:txBody>
+          <a:bodyPr wrap="square" lIns="0" tIns="0" rIns="0" bIns="0" rtlCol="0" anchor="t">
+            <a:normAutofit/>
+          </a:bodyPr>
+          <a:lstStyle/>
+          <a:p>
+            <a:pPr algn="l" indent="0" marL="0">
+              <a:lnSpc>
+                <a:spcPts val="1820"/>
+              </a:lnSpc>
+              <a:buNone/>
+            </a:pPr>
+            <a:r>
+              <a:rPr lang="en-US" sz="1300" dirty="0">
+                <a:solidFill>
+                  <a:srgbClr val="F6F4EE"/>
+                </a:solidFill>
+                <a:latin typeface="IBM Plex Sans" pitchFamily="34" charset="0"/>
+                <a:ea typeface="IBM Plex Sans" pitchFamily="34" charset="-122"/>
+                <a:cs typeface="IBM Plex Sans" pitchFamily="34" charset="-120"/>
+              </a:rPr>
+              <a:t>16.7%</a:t>
+            </a:r>
+            <a:endParaRPr lang="en-US" sz="1300" dirty="0"/>
+          </a:p>
+        </p:txBody>
+      </p:sp>
+      <p:sp>
+        <p:nvSpPr>
+          <p:cNvPr id="31" name="Text 29"/>
+          <p:cNvSpPr/>
+          <p:nvPr/>
+        </p:nvSpPr>
+        <p:spPr>
+          <a:xfrm>
+            <a:off x="8077200" y="1957071"/>
+            <a:ext cx="3401060" cy="787400"/>
+          </a:xfrm>
+          <a:prstGeom prst="rect">
+            <a:avLst/>
+          </a:prstGeom>
+          <a:noFill/>
+          <a:ln/>
+        </p:spPr>
+        <p:txBody>
+          <a:bodyPr wrap="square" lIns="0" tIns="0" rIns="0" bIns="0" rtlCol="0" anchor="t">
+            <a:normAutofit/>
+          </a:bodyPr>
+          <a:lstStyle/>
+          <a:p>
+            <a:pPr algn="l" indent="0" marL="0">
+              <a:lnSpc>
+                <a:spcPts val="6000"/>
+              </a:lnSpc>
+              <a:buNone/>
+            </a:pPr>
+            <a:r>
+              <a:rPr lang="en-US" sz="6000" b="1" dirty="0">
+                <a:solidFill>
+                  <a:srgbClr val="F2A65A"/>
                 </a:solidFill>
                 <a:latin typeface="Source Serif 4" pitchFamily="18" charset="0"/>
                 <a:ea typeface="Source Serif 4" pitchFamily="18" charset="-122"/>
                 <a:cs typeface="Source Serif 4" pitchFamily="18" charset="-120"/>
               </a:rPr>
-              <a:t>loans with a known outcome are in default.</a:t>
-            </a:r>
-            <a:endParaRPr lang="en-US" sz="2800" dirty="0"/>
-          </a:p>
-        </p:txBody>
-      </p:sp>
-      <p:sp>
-        <p:nvSpPr>
-          <p:cNvPr id="5" name="Text 3"/>
-          <p:cNvSpPr/>
-          <p:nvPr/>
-        </p:nvSpPr>
-        <p:spPr>
-          <a:xfrm>
-            <a:off x="4873784" y="3500121"/>
-            <a:ext cx="6700579" cy="309880"/>
+              <a:t>~5×</a:t>
+            </a:r>
+            <a:endParaRPr lang="en-US" sz="6000" dirty="0"/>
+          </a:p>
+        </p:txBody>
+      </p:sp>
+      <p:sp>
+        <p:nvSpPr>
+          <p:cNvPr id="32" name="Text 30"/>
+          <p:cNvSpPr/>
+          <p:nvPr/>
+        </p:nvSpPr>
+        <p:spPr>
+          <a:xfrm>
+            <a:off x="8077200" y="2896871"/>
+            <a:ext cx="3401060" cy="594360"/>
           </a:xfrm>
           <a:prstGeom prst="rect">
             <a:avLst/>
@@ -2326,13 +3318,13 @@
             <a:r>
               <a:rPr lang="en-US" sz="1600" dirty="0">
                 <a:solidFill>
-                  <a:srgbClr val="B9C2D6"/>
+                  <a:srgbClr val="F6F4EE"/>
                 </a:solidFill>
                 <a:latin typeface="IBM Plex Sans" pitchFamily="34" charset="0"/>
                 <a:ea typeface="IBM Plex Sans" pitchFamily="34" charset="-122"/>
                 <a:cs typeface="IBM Plex Sans" pitchFamily="34" charset="-120"/>
               </a:rPr>
-              <a:t>116,710 of 836,042 loans · 14.0%</a:t>
+              <a:t>G-rated loans default about five times as often as AA-rated loans.</a:t>
             </a:r>
             <a:endParaRPr lang="en-US" sz="1600" dirty="0"/>
           </a:p>
@@ -2340,14 +3332,14 @@
       </p:sp>
       <p:sp>
         <p:nvSpPr>
-          <p:cNvPr id="6" name="Text 4"/>
-          <p:cNvSpPr/>
-          <p:nvPr/>
-        </p:nvSpPr>
-        <p:spPr>
-          <a:xfrm>
-            <a:off x="812800" y="5252721"/>
-            <a:ext cx="9810750" cy="614680"/>
+          <p:cNvPr id="33" name="Text 31"/>
+          <p:cNvSpPr/>
+          <p:nvPr/>
+        </p:nvSpPr>
+        <p:spPr>
+          <a:xfrm>
+            <a:off x="8077200" y="3643629"/>
+            <a:ext cx="3401060" cy="772160"/>
           </a:xfrm>
           <a:prstGeom prst="rect">
             <a:avLst/>
@@ -2363,35 +3355,35 @@
           <a:p>
             <a:pPr algn="l" indent="0" marL="0">
               <a:lnSpc>
-                <a:spcPts val="2320"/>
+                <a:spcPts val="1960"/>
               </a:lnSpc>
               <a:buNone/>
             </a:pPr>
             <a:r>
-              <a:rPr lang="en-US" sz="1600" dirty="0">
-                <a:solidFill>
-                  <a:srgbClr val="D5DBE7"/>
+              <a:rPr lang="en-US" sz="1400" dirty="0">
+                <a:solidFill>
+                  <a:srgbClr val="B9C2D6"/>
                 </a:solidFill>
                 <a:latin typeface="IBM Plex Sans" pitchFamily="34" charset="0"/>
                 <a:ea typeface="IBM Plex Sans" pitchFamily="34" charset="-122"/>
                 <a:cs typeface="IBM Plex Sans" pitchFamily="34" charset="-120"/>
               </a:rPr>
-              <a:t>And the gaps are not random: 40% of loans have no risk rating and 32% no income, mostly older loans. Analysis by rating or income will describe recent lending.</a:t>
-            </a:r>
-            <a:endParaRPr lang="en-US" sz="1600" dirty="0"/>
-          </a:p>
-        </p:txBody>
-      </p:sp>
-      <p:sp>
-        <p:nvSpPr>
-          <p:cNvPr id="7" name="Text 5"/>
-          <p:cNvSpPr/>
-          <p:nvPr/>
-        </p:nvSpPr>
-        <p:spPr>
-          <a:xfrm>
-            <a:off x="812800" y="6238242"/>
-            <a:ext cx="2544318" cy="238760"/>
+              <a:t>Unrated loans default at 16.7%, above the 13.7% average: a missing rating is itself a warning sign.</a:t>
+            </a:r>
+            <a:endParaRPr lang="en-US" sz="1400" dirty="0"/>
+          </a:p>
+        </p:txBody>
+      </p:sp>
+      <p:sp>
+        <p:nvSpPr>
+          <p:cNvPr id="34" name="Text 32"/>
+          <p:cNvSpPr/>
+          <p:nvPr/>
+        </p:nvSpPr>
+        <p:spPr>
+          <a:xfrm>
+            <a:off x="812800" y="4747264"/>
+            <a:ext cx="10883392" cy="220980"/>
           </a:xfrm>
           <a:prstGeom prst="rect">
             <a:avLst/>
@@ -2407,12 +3399,12 @@
           <a:p>
             <a:pPr algn="l" indent="0" marL="0">
               <a:lnSpc>
-                <a:spcPts val="1680"/>
+                <a:spcPts val="1540"/>
               </a:lnSpc>
               <a:buNone/>
             </a:pPr>
             <a:r>
-              <a:rPr lang="en-US" sz="1200" dirty="0">
+              <a:rPr lang="en-US" sz="1100" dirty="0">
                 <a:solidFill>
                   <a:srgbClr val="9AA4BA"/>
                 </a:solidFill>
@@ -2420,6 +3412,50 @@
                 <a:ea typeface="IBM Plex Sans" pitchFamily="34" charset="-122"/>
                 <a:cs typeface="IBM Plex Sans" pitchFamily="34" charset="-120"/>
               </a:rPr>
+              <a:t>Default rate by risk rating, loans issued 2023–2025. HR left out: only 19 loans.</a:t>
+            </a:r>
+            <a:endParaRPr lang="en-US" sz="1100" dirty="0"/>
+          </a:p>
+        </p:txBody>
+      </p:sp>
+      <p:sp>
+        <p:nvSpPr>
+          <p:cNvPr id="35" name="Text 33"/>
+          <p:cNvSpPr/>
+          <p:nvPr/>
+        </p:nvSpPr>
+        <p:spPr>
+          <a:xfrm>
+            <a:off x="812800" y="6238242"/>
+            <a:ext cx="2544318" cy="238760"/>
+          </a:xfrm>
+          <a:prstGeom prst="rect">
+            <a:avLst/>
+          </a:prstGeom>
+          <a:noFill/>
+          <a:ln/>
+        </p:spPr>
+        <p:txBody>
+          <a:bodyPr wrap="square" lIns="0" tIns="0" rIns="0" bIns="0" rtlCol="0" anchor="t">
+            <a:normAutofit/>
+          </a:bodyPr>
+          <a:lstStyle/>
+          <a:p>
+            <a:pPr algn="l" indent="0" marL="0">
+              <a:lnSpc>
+                <a:spcPts val="1680"/>
+              </a:lnSpc>
+              <a:buNone/>
+            </a:pPr>
+            <a:r>
+              <a:rPr lang="en-US" sz="1200" dirty="0">
+                <a:solidFill>
+                  <a:srgbClr val="9AA4BA"/>
+                </a:solidFill>
+                <a:latin typeface="IBM Plex Sans" pitchFamily="34" charset="0"/>
+                <a:ea typeface="IBM Plex Sans" pitchFamily="34" charset="-122"/>
+                <a:cs typeface="IBM Plex Sans" pitchFamily="34" charset="-120"/>
+              </a:rPr>
               <a:t>Bondora credit risk · Standup 1</a:t>
             </a:r>
             <a:endParaRPr lang="en-US" sz="1200" dirty="0"/>
@@ -2428,7 +3464,7 @@
       </p:sp>
       <p:sp>
         <p:nvSpPr>
-          <p:cNvPr id="8" name="Text 6"/>
+          <p:cNvPr id="36" name="Text 34"/>
           <p:cNvSpPr/>
           <p:nvPr/>
         </p:nvSpPr>
@@ -3756,7 +4792,7 @@
                 <a:ea typeface="Source Serif 4" pitchFamily="18" charset="-122"/>
                 <a:cs typeface="Source Serif 4" pitchFamily="18" charset="-120"/>
               </a:rPr>
-              <a:t>How we measure risk</a:t>
+              <a:t>How we measure risk, and first results</a:t>
             </a:r>
             <a:endParaRPr lang="en-US" sz="3600" dirty="0"/>
           </a:p>
@@ -3778,18 +4814,18 @@
         </p:nvGraphicFramePr>
         <p:xfrm>
           <a:off x="822960" y="2021840"/>
-          <a:ext cx="10556240" cy="2415540"/>
+          <a:ext cx="10556240" cy="2246630"/>
         </p:xfrm>
         <a:graphic>
           <a:graphicData uri="http://schemas.openxmlformats.org/drawingml/2006/table">
             <a:tbl>
               <a:tblPr/>
               <a:tblGrid>
-                <a:gridCol w="2955747"/>
-                <a:gridCol w="4433621"/>
-                <a:gridCol w="3166872"/>
+                <a:gridCol w="2744622"/>
+                <a:gridCol w="4011371"/>
+                <a:gridCol w="3800246"/>
               </a:tblGrid>
-              <a:tr h="383540">
+              <a:tr h="356870">
                 <a:tc>
                   <a:txBody>
                     <a:bodyPr/>
@@ -3797,12 +4833,12 @@
                     <a:p>
                       <a:pPr indent="0" marL="0">
                         <a:lnSpc>
-                          <a:spcPts val="1960"/>
+                          <a:spcPts val="1820"/>
                         </a:lnSpc>
                         <a:buNone/>
                       </a:pPr>
                       <a:r>
-                        <a:rPr lang="en-US" sz="1400" b="1" dirty="0">
+                        <a:rPr lang="en-US" sz="1300" b="1" dirty="0">
                           <a:solidFill>
                             <a:srgbClr val="F6F4EE"/>
                           </a:solidFill>
@@ -3812,14 +4848,14 @@
                         </a:rPr>
                         <a:t>KPI</a:t>
                       </a:r>
-                      <a:endParaRPr lang="en-US" sz="1400" dirty="0">
+                      <a:endParaRPr lang="en-US" sz="1300" dirty="0">
                         <a:latin typeface="IBM Plex Sans" charset="0"/>
                         <a:ea typeface="IBM Plex Sans" charset="0"/>
                         <a:cs typeface="IBM Plex Sans" charset="0"/>
                       </a:endParaRPr>
                     </a:p>
                   </a:txBody>
-                  <a:tcPr marL="62230" marR="62230" marT="62230" marB="62230" anchor="t">
+                  <a:tcPr marL="57785" marR="57785" marT="57785" marB="57785" anchor="t">
                     <a:lnL w="12700" cap="flat" cmpd="sng" algn="ctr">
                       <a:solidFill>
                         <a:srgbClr val="C4C3BE"/>
@@ -3868,12 +4904,12 @@
                     <a:p>
                       <a:pPr indent="0" marL="0">
                         <a:lnSpc>
-                          <a:spcPts val="1960"/>
+                          <a:spcPts val="1820"/>
                         </a:lnSpc>
                         <a:buNone/>
                       </a:pPr>
                       <a:r>
-                        <a:rPr lang="en-US" sz="1400" b="1" dirty="0">
+                        <a:rPr lang="en-US" sz="1300" b="1" dirty="0">
                           <a:solidFill>
                             <a:srgbClr val="F6F4EE"/>
                           </a:solidFill>
@@ -3883,14 +4919,14 @@
                         </a:rPr>
                         <a:t>Definition</a:t>
                       </a:r>
-                      <a:endParaRPr lang="en-US" sz="1400" dirty="0">
+                      <a:endParaRPr lang="en-US" sz="1300" dirty="0">
                         <a:latin typeface="IBM Plex Sans" charset="0"/>
                         <a:ea typeface="IBM Plex Sans" charset="0"/>
                         <a:cs typeface="IBM Plex Sans" charset="0"/>
                       </a:endParaRPr>
                     </a:p>
                   </a:txBody>
-                  <a:tcPr marL="62230" marR="62230" marT="62230" marB="62230" anchor="t">
+                  <a:tcPr marL="57785" marR="57785" marT="57785" marB="57785" anchor="t">
                     <a:lnL w="12700" cap="flat" cmpd="sng" algn="ctr">
                       <a:solidFill>
                         <a:srgbClr val="141E34"/>
@@ -3939,12 +4975,12 @@
                     <a:p>
                       <a:pPr indent="0" marL="0">
                         <a:lnSpc>
-                          <a:spcPts val="1960"/>
+                          <a:spcPts val="1820"/>
                         </a:lnSpc>
                         <a:buNone/>
                       </a:pPr>
                       <a:r>
-                        <a:rPr lang="en-US" sz="1400" b="1" dirty="0">
+                        <a:rPr lang="en-US" sz="1300" b="1" dirty="0">
                           <a:solidFill>
                             <a:srgbClr val="F6F4EE"/>
                           </a:solidFill>
@@ -3952,16 +4988,16 @@
                           <a:ea typeface="IBM Plex Sans" pitchFamily="34" charset="-122"/>
                           <a:cs typeface="IBM Plex Sans" pitchFamily="34" charset="-120"/>
                         </a:rPr>
-                        <a:t>Why it matters</a:t>
+                        <a:t>Result so far</a:t>
                       </a:r>
-                      <a:endParaRPr lang="en-US" sz="1400" dirty="0">
+                      <a:endParaRPr lang="en-US" sz="1300" dirty="0">
                         <a:latin typeface="IBM Plex Sans" charset="0"/>
                         <a:ea typeface="IBM Plex Sans" charset="0"/>
                         <a:cs typeface="IBM Plex Sans" charset="0"/>
                       </a:endParaRPr>
                     </a:p>
                   </a:txBody>
-                  <a:tcPr marL="62230" marR="62230" marT="62230" marB="62230" anchor="t">
+                  <a:tcPr marL="57785" marR="57785" marT="57785" marB="57785" anchor="t">
                     <a:lnL w="12700" cap="flat" cmpd="sng" algn="ctr">
                       <a:solidFill>
                         <a:srgbClr val="141E34"/>
@@ -4004,7 +5040,7 @@
                   </a:tcPr>
                 </a:tc>
               </a:tr>
-              <a:tr h="383540">
+              <a:tr h="356870">
                 <a:tc>
                   <a:txBody>
                     <a:bodyPr/>
@@ -4012,12 +5048,12 @@
                     <a:p>
                       <a:pPr indent="0" marL="0">
                         <a:lnSpc>
-                          <a:spcPts val="1960"/>
+                          <a:spcPts val="1820"/>
                         </a:lnSpc>
                         <a:buNone/>
                       </a:pPr>
                       <a:r>
-                        <a:rPr lang="en-US" sz="1400" dirty="0">
+                        <a:rPr lang="en-US" sz="1300" dirty="0">
                           <a:solidFill>
                             <a:srgbClr val="14213D"/>
                           </a:solidFill>
@@ -4027,14 +5063,14 @@
                         </a:rPr>
                         <a:t>Default rate</a:t>
                       </a:r>
-                      <a:endParaRPr lang="en-US" sz="1400" dirty="0">
+                      <a:endParaRPr lang="en-US" sz="1300" dirty="0">
                         <a:latin typeface="IBM Plex Sans" charset="0"/>
                         <a:ea typeface="IBM Plex Sans" charset="0"/>
                         <a:cs typeface="IBM Plex Sans" charset="0"/>
                       </a:endParaRPr>
                     </a:p>
                   </a:txBody>
-                  <a:tcPr marL="62230" marR="62230" marT="62230" marB="62230" anchor="t">
+                  <a:tcPr marL="57785" marR="57785" marT="57785" marB="57785" anchor="t">
                     <a:lnL w="12700" cap="flat" cmpd="sng" algn="ctr">
                       <a:solidFill>
                         <a:srgbClr val="C4C3BE"/>
@@ -4083,12 +5119,12 @@
                     <a:p>
                       <a:pPr indent="0" marL="0">
                         <a:lnSpc>
-                          <a:spcPts val="1960"/>
+                          <a:spcPts val="1820"/>
                         </a:lnSpc>
                         <a:buNone/>
                       </a:pPr>
                       <a:r>
-                        <a:rPr lang="en-US" sz="1400" dirty="0">
+                        <a:rPr lang="en-US" sz="1300" dirty="0">
                           <a:solidFill>
                             <a:srgbClr val="4A5568"/>
                           </a:solidFill>
@@ -4098,14 +5134,14 @@
                         </a:rPr>
                         <a:t>Share of loans in default</a:t>
                       </a:r>
-                      <a:endParaRPr lang="en-US" sz="1400" dirty="0">
+                      <a:endParaRPr lang="en-US" sz="1300" dirty="0">
                         <a:latin typeface="IBM Plex Sans" charset="0"/>
                         <a:ea typeface="IBM Plex Sans" charset="0"/>
                         <a:cs typeface="IBM Plex Sans" charset="0"/>
                       </a:endParaRPr>
                     </a:p>
                   </a:txBody>
-                  <a:tcPr marL="62230" marR="62230" marT="62230" marB="62230" anchor="t">
+                  <a:tcPr marL="57785" marR="57785" marT="57785" marB="57785" anchor="t">
                     <a:lnL w="12700" cap="flat" cmpd="sng" algn="ctr">
                       <a:solidFill>
                         <a:srgbClr val="CBCAC6"/>
@@ -4154,29 +5190,29 @@
                     <a:p>
                       <a:pPr indent="0" marL="0">
                         <a:lnSpc>
-                          <a:spcPts val="1960"/>
+                          <a:spcPts val="1820"/>
                         </a:lnSpc>
                         <a:buNone/>
                       </a:pPr>
                       <a:r>
-                        <a:rPr lang="en-US" sz="1400" dirty="0">
+                        <a:rPr lang="en-US" sz="1300" dirty="0">
                           <a:solidFill>
-                            <a:srgbClr val="4A5568"/>
+                            <a:srgbClr val="14213D"/>
                           </a:solidFill>
                           <a:latin typeface="IBM Plex Sans" pitchFamily="34" charset="0"/>
                           <a:ea typeface="IBM Plex Sans" pitchFamily="34" charset="-122"/>
                           <a:cs typeface="IBM Plex Sans" pitchFamily="34" charset="-120"/>
                         </a:rPr>
-                        <a:t>Main outcome</a:t>
+                        <a:t>13.7% (56,364 of 410,865)</a:t>
                       </a:r>
-                      <a:endParaRPr lang="en-US" sz="1400" dirty="0">
+                      <a:endParaRPr lang="en-US" sz="1300" dirty="0">
                         <a:latin typeface="IBM Plex Sans" charset="0"/>
                         <a:ea typeface="IBM Plex Sans" charset="0"/>
                         <a:cs typeface="IBM Plex Sans" charset="0"/>
                       </a:endParaRPr>
                     </a:p>
                   </a:txBody>
-                  <a:tcPr marL="62230" marR="62230" marT="62230" marB="62230" anchor="t">
+                  <a:tcPr marL="57785" marR="57785" marT="57785" marB="57785" anchor="t">
                     <a:lnL w="12700" cap="flat" cmpd="sng" algn="ctr">
                       <a:solidFill>
                         <a:srgbClr val="CBCAC6"/>
@@ -4219,7 +5255,7 @@
                   </a:tcPr>
                 </a:tc>
               </a:tr>
-              <a:tr h="632460">
+              <a:tr h="588010">
                 <a:tc>
                   <a:txBody>
                     <a:bodyPr/>
@@ -4227,12 +5263,12 @@
                     <a:p>
                       <a:pPr indent="0" marL="0">
                         <a:lnSpc>
-                          <a:spcPts val="1960"/>
+                          <a:spcPts val="1820"/>
                         </a:lnSpc>
                         <a:buNone/>
                       </a:pPr>
                       <a:r>
-                        <a:rPr lang="en-US" sz="1400" dirty="0">
+                        <a:rPr lang="en-US" sz="1300" dirty="0">
                           <a:solidFill>
                             <a:srgbClr val="14213D"/>
                           </a:solidFill>
@@ -4242,14 +5278,14 @@
                         </a:rPr>
                         <a:t>12-month default rate</a:t>
                       </a:r>
-                      <a:endParaRPr lang="en-US" sz="1400" dirty="0">
+                      <a:endParaRPr lang="en-US" sz="1300" dirty="0">
                         <a:latin typeface="IBM Plex Sans" charset="0"/>
                         <a:ea typeface="IBM Plex Sans" charset="0"/>
                         <a:cs typeface="IBM Plex Sans" charset="0"/>
                       </a:endParaRPr>
                     </a:p>
                   </a:txBody>
-                  <a:tcPr marL="62230" marR="62230" marT="62230" marB="62230" anchor="t">
+                  <a:tcPr marL="57785" marR="57785" marT="57785" marB="57785" anchor="t">
                     <a:lnL w="12700" cap="flat" cmpd="sng" algn="ctr">
                       <a:solidFill>
                         <a:srgbClr val="C4C3BE"/>
@@ -4298,12 +5334,12 @@
                     <a:p>
                       <a:pPr indent="0" marL="0">
                         <a:lnSpc>
-                          <a:spcPts val="1960"/>
+                          <a:spcPts val="1820"/>
                         </a:lnSpc>
                         <a:buNone/>
                       </a:pPr>
                       <a:r>
-                        <a:rPr lang="en-US" sz="1400" dirty="0">
+                        <a:rPr lang="en-US" sz="1300" dirty="0">
                           <a:solidFill>
                             <a:srgbClr val="4A5568"/>
                           </a:solidFill>
@@ -4311,16 +5347,16 @@
                           <a:ea typeface="IBM Plex Sans" pitchFamily="34" charset="-122"/>
                           <a:cs typeface="IBM Plex Sans" pitchFamily="34" charset="-120"/>
                         </a:rPr>
-                        <a:t>Defaults in a loan’s first year, for loans old enough to measure</a:t>
+                        <a:t>Defaults in a loan’s first year, for loans with a known outcome</a:t>
                       </a:r>
-                      <a:endParaRPr lang="en-US" sz="1400" dirty="0">
+                      <a:endParaRPr lang="en-US" sz="1300" dirty="0">
                         <a:latin typeface="IBM Plex Sans" charset="0"/>
                         <a:ea typeface="IBM Plex Sans" charset="0"/>
                         <a:cs typeface="IBM Plex Sans" charset="0"/>
                       </a:endParaRPr>
                     </a:p>
                   </a:txBody>
-                  <a:tcPr marL="62230" marR="62230" marT="62230" marB="62230" anchor="t">
+                  <a:tcPr marL="57785" marR="57785" marT="57785" marB="57785" anchor="t">
                     <a:lnL w="12700" cap="flat" cmpd="sng" algn="ctr">
                       <a:solidFill>
                         <a:srgbClr val="C4C3BE"/>
@@ -4369,29 +5405,29 @@
                     <a:p>
                       <a:pPr indent="0" marL="0">
                         <a:lnSpc>
-                          <a:spcPts val="1960"/>
+                          <a:spcPts val="1820"/>
                         </a:lnSpc>
                         <a:buNone/>
                       </a:pPr>
                       <a:r>
-                        <a:rPr lang="en-US" sz="1400" dirty="0">
+                        <a:rPr lang="en-US" sz="1300" dirty="0">
                           <a:solidFill>
-                            <a:srgbClr val="4A5568"/>
+                            <a:srgbClr val="14213D"/>
                           </a:solidFill>
                           <a:latin typeface="IBM Plex Sans" pitchFamily="34" charset="0"/>
                           <a:ea typeface="IBM Plex Sans" pitchFamily="34" charset="-122"/>
                           <a:cs typeface="IBM Plex Sans" pitchFamily="34" charset="-120"/>
                         </a:rPr>
-                        <a:t>Early warning, fair across years</a:t>
+                        <a:t>9.1% (of 385,399 loans)</a:t>
                       </a:r>
-                      <a:endParaRPr lang="en-US" sz="1400" dirty="0">
+                      <a:endParaRPr lang="en-US" sz="1300" dirty="0">
                         <a:latin typeface="IBM Plex Sans" charset="0"/>
                         <a:ea typeface="IBM Plex Sans" charset="0"/>
                         <a:cs typeface="IBM Plex Sans" charset="0"/>
                       </a:endParaRPr>
                     </a:p>
                   </a:txBody>
-                  <a:tcPr marL="62230" marR="62230" marT="62230" marB="62230" anchor="t">
+                  <a:tcPr marL="57785" marR="57785" marT="57785" marB="57785" anchor="t">
                     <a:lnL w="12700" cap="flat" cmpd="sng" algn="ctr">
                       <a:solidFill>
                         <a:srgbClr val="C4C3BE"/>
@@ -4434,7 +5470,7 @@
                   </a:tcPr>
                 </a:tc>
               </a:tr>
-              <a:tr h="632460">
+              <a:tr h="588010">
                 <a:tc>
                   <a:txBody>
                     <a:bodyPr/>
@@ -4442,12 +5478,12 @@
                     <a:p>
                       <a:pPr indent="0" marL="0">
                         <a:lnSpc>
-                          <a:spcPts val="1960"/>
+                          <a:spcPts val="1820"/>
                         </a:lnSpc>
                         <a:buNone/>
                       </a:pPr>
                       <a:r>
-                        <a:rPr lang="en-US" sz="1400" dirty="0">
+                        <a:rPr lang="en-US" sz="1300" dirty="0">
                           <a:solidFill>
                             <a:srgbClr val="14213D"/>
                           </a:solidFill>
@@ -4457,14 +5493,14 @@
                         </a:rPr>
                         <a:t>Default rate by segment</a:t>
                       </a:r>
-                      <a:endParaRPr lang="en-US" sz="1400" dirty="0">
+                      <a:endParaRPr lang="en-US" sz="1300" dirty="0">
                         <a:latin typeface="IBM Plex Sans" charset="0"/>
                         <a:ea typeface="IBM Plex Sans" charset="0"/>
                         <a:cs typeface="IBM Plex Sans" charset="0"/>
                       </a:endParaRPr>
                     </a:p>
                   </a:txBody>
-                  <a:tcPr marL="62230" marR="62230" marT="62230" marB="62230" anchor="t">
+                  <a:tcPr marL="57785" marR="57785" marT="57785" marB="57785" anchor="t">
                     <a:lnL w="12700" cap="flat" cmpd="sng" algn="ctr">
                       <a:solidFill>
                         <a:srgbClr val="C4C3BE"/>
@@ -4513,12 +5549,12 @@
                     <a:p>
                       <a:pPr indent="0" marL="0">
                         <a:lnSpc>
-                          <a:spcPts val="1960"/>
+                          <a:spcPts val="1820"/>
                         </a:lnSpc>
                         <a:buNone/>
                       </a:pPr>
                       <a:r>
-                        <a:rPr lang="en-US" sz="1400" dirty="0">
+                        <a:rPr lang="en-US" sz="1300" dirty="0">
                           <a:solidFill>
                             <a:srgbClr val="4A5568"/>
                           </a:solidFill>
@@ -4528,14 +5564,14 @@
                         </a:rPr>
                         <a:t>By risk rating, country, income, amount, interest rate, duration</a:t>
                       </a:r>
-                      <a:endParaRPr lang="en-US" sz="1400" dirty="0">
+                      <a:endParaRPr lang="en-US" sz="1300" dirty="0">
                         <a:latin typeface="IBM Plex Sans" charset="0"/>
                         <a:ea typeface="IBM Plex Sans" charset="0"/>
                         <a:cs typeface="IBM Plex Sans" charset="0"/>
                       </a:endParaRPr>
                     </a:p>
                   </a:txBody>
-                  <a:tcPr marL="62230" marR="62230" marT="62230" marB="62230" anchor="t">
+                  <a:tcPr marL="57785" marR="57785" marT="57785" marB="57785" anchor="t">
                     <a:lnL w="12700" cap="flat" cmpd="sng" algn="ctr">
                       <a:solidFill>
                         <a:srgbClr val="CBCAC6"/>
@@ -4584,29 +5620,29 @@
                     <a:p>
                       <a:pPr indent="0" marL="0">
                         <a:lnSpc>
-                          <a:spcPts val="1960"/>
+                          <a:spcPts val="1820"/>
                         </a:lnSpc>
                         <a:buNone/>
                       </a:pPr>
                       <a:r>
-                        <a:rPr lang="en-US" sz="1400" dirty="0">
+                        <a:rPr lang="en-US" sz="1300" dirty="0">
                           <a:solidFill>
-                            <a:srgbClr val="4A5568"/>
+                            <a:srgbClr val="14213D"/>
                           </a:solidFill>
                           <a:latin typeface="IBM Plex Sans" pitchFamily="34" charset="0"/>
                           <a:ea typeface="IBM Plex Sans" pitchFamily="34" charset="-122"/>
                           <a:cs typeface="IBM Plex Sans" pitchFamily="34" charset="-120"/>
                         </a:rPr>
-                        <a:t>Shows which groups drive risk</a:t>
+                        <a:t>Rating done: AA 5.5% → G 26.5%; others next</a:t>
                       </a:r>
-                      <a:endParaRPr lang="en-US" sz="1400" dirty="0">
+                      <a:endParaRPr lang="en-US" sz="1300" dirty="0">
                         <a:latin typeface="IBM Plex Sans" charset="0"/>
                         <a:ea typeface="IBM Plex Sans" charset="0"/>
                         <a:cs typeface="IBM Plex Sans" charset="0"/>
                       </a:endParaRPr>
                     </a:p>
                   </a:txBody>
-                  <a:tcPr marL="62230" marR="62230" marT="62230" marB="62230" anchor="t">
+                  <a:tcPr marL="57785" marR="57785" marT="57785" marB="57785" anchor="t">
                     <a:lnL w="12700" cap="flat" cmpd="sng" algn="ctr">
                       <a:solidFill>
                         <a:srgbClr val="CBCAC6"/>
@@ -4649,7 +5685,7 @@
                   </a:tcPr>
                 </a:tc>
               </a:tr>
-              <a:tr h="383540">
+              <a:tr h="356870">
                 <a:tc>
                   <a:txBody>
                     <a:bodyPr/>
@@ -4657,12 +5693,12 @@
                     <a:p>
                       <a:pPr indent="0" marL="0">
                         <a:lnSpc>
-                          <a:spcPts val="1960"/>
+                          <a:spcPts val="1820"/>
                         </a:lnSpc>
                         <a:buNone/>
                       </a:pPr>
                       <a:r>
-                        <a:rPr lang="en-US" sz="1400" dirty="0">
+                        <a:rPr lang="en-US" sz="1300" dirty="0">
                           <a:solidFill>
                             <a:srgbClr val="14213D"/>
                           </a:solidFill>
@@ -4672,14 +5708,14 @@
                         </a:rPr>
                         <a:t>Data completeness</a:t>
                       </a:r>
-                      <a:endParaRPr lang="en-US" sz="1400" dirty="0">
+                      <a:endParaRPr lang="en-US" sz="1300" dirty="0">
                         <a:latin typeface="IBM Plex Sans" charset="0"/>
                         <a:ea typeface="IBM Plex Sans" charset="0"/>
                         <a:cs typeface="IBM Plex Sans" charset="0"/>
                       </a:endParaRPr>
                     </a:p>
                   </a:txBody>
-                  <a:tcPr marL="62230" marR="62230" marT="62230" marB="62230" anchor="t">
+                  <a:tcPr marL="57785" marR="57785" marT="57785" marB="57785" anchor="t">
                     <a:lnL w="12700" cap="flat" cmpd="sng" algn="ctr">
                       <a:solidFill>
                         <a:srgbClr val="C4C3BE"/>
@@ -4728,12 +5764,12 @@
                     <a:p>
                       <a:pPr indent="0" marL="0">
                         <a:lnSpc>
-                          <a:spcPts val="1960"/>
+                          <a:spcPts val="1820"/>
                         </a:lnSpc>
                         <a:buNone/>
                       </a:pPr>
                       <a:r>
-                        <a:rPr lang="en-US" sz="1400" dirty="0">
+                        <a:rPr lang="en-US" sz="1300" dirty="0">
                           <a:solidFill>
                             <a:srgbClr val="4A5568"/>
                           </a:solidFill>
@@ -4741,16 +5777,16 @@
                           <a:ea typeface="IBM Plex Sans" pitchFamily="34" charset="-122"/>
                           <a:cs typeface="IBM Plex Sans" pitchFamily="34" charset="-120"/>
                         </a:rPr>
-                        <a:t>Share missing per key column</a:t>
+                        <a:t>Share missing per column, and why</a:t>
                       </a:r>
-                      <a:endParaRPr lang="en-US" sz="1400" dirty="0">
+                      <a:endParaRPr lang="en-US" sz="1300" dirty="0">
                         <a:latin typeface="IBM Plex Sans" charset="0"/>
                         <a:ea typeface="IBM Plex Sans" charset="0"/>
                         <a:cs typeface="IBM Plex Sans" charset="0"/>
                       </a:endParaRPr>
                     </a:p>
                   </a:txBody>
-                  <a:tcPr marL="62230" marR="62230" marT="62230" marB="62230" anchor="t">
+                  <a:tcPr marL="57785" marR="57785" marT="57785" marB="57785" anchor="t">
                     <a:lnL w="12700" cap="flat" cmpd="sng" algn="ctr">
                       <a:solidFill>
                         <a:srgbClr val="C4C3BE"/>
@@ -4799,29 +5835,29 @@
                     <a:p>
                       <a:pPr indent="0" marL="0">
                         <a:lnSpc>
-                          <a:spcPts val="1960"/>
+                          <a:spcPts val="1820"/>
                         </a:lnSpc>
                         <a:buNone/>
                       </a:pPr>
                       <a:r>
-                        <a:rPr lang="en-US" sz="1400" dirty="0">
+                        <a:rPr lang="en-US" sz="1300" dirty="0">
                           <a:solidFill>
-                            <a:srgbClr val="4A5568"/>
+                            <a:srgbClr val="14213D"/>
                           </a:solidFill>
                           <a:latin typeface="IBM Plex Sans" pitchFamily="34" charset="0"/>
                           <a:ea typeface="IBM Plex Sans" pitchFamily="34" charset="-122"/>
                           <a:cs typeface="IBM Plex Sans" pitchFamily="34" charset="-120"/>
                         </a:rPr>
-                        <a:t>How far results can be trusted</a:t>
+                        <a:t>All 21 columns checked and explained</a:t>
                       </a:r>
-                      <a:endParaRPr lang="en-US" sz="1400" dirty="0">
+                      <a:endParaRPr lang="en-US" sz="1300" dirty="0">
                         <a:latin typeface="IBM Plex Sans" charset="0"/>
                         <a:ea typeface="IBM Plex Sans" charset="0"/>
                         <a:cs typeface="IBM Plex Sans" charset="0"/>
                       </a:endParaRPr>
                     </a:p>
                   </a:txBody>
-                  <a:tcPr marL="62230" marR="62230" marT="62230" marB="62230" anchor="t">
+                  <a:tcPr marL="57785" marR="57785" marT="57785" marB="57785" anchor="t">
                     <a:lnL w="12700" cap="flat" cmpd="sng" algn="ctr">
                       <a:solidFill>
                         <a:srgbClr val="C4C3BE"/>
@@ -5182,7 +6218,7 @@
                 <a:ea typeface="IBM Plex Sans" pitchFamily="34" charset="-122"/>
                 <a:cs typeface="IBM Plex Sans" pitchFamily="34" charset="-120"/>
               </a:rPr>
-              <a:t>loans, one row each</a:t>
+              <a:t>loans in the raw file, 2009–2026</a:t>
             </a:r>
             <a:endParaRPr lang="en-US" sz="1400" dirty="0"/>
           </a:p>
@@ -5205,7 +6241,7 @@
             </a:avLst>
           </a:prstGeom>
           <a:solidFill>
-            <a:srgbClr val="F6F4EE"/>
+            <a:srgbClr val="14213D"/>
           </a:solidFill>
           <a:ln/>
         </p:spPr>
@@ -5242,13 +6278,13 @@
             <a:r>
               <a:rPr lang="en-US" sz="4400" b="1" dirty="0">
                 <a:solidFill>
-                  <a:srgbClr val="14213D"/>
+                  <a:srgbClr val="F2A65A"/>
                 </a:solidFill>
                 <a:latin typeface="Source Serif 4" pitchFamily="18" charset="0"/>
                 <a:ea typeface="Source Serif 4" pitchFamily="18" charset="-122"/>
                 <a:cs typeface="Source Serif 4" pitchFamily="18" charset="-120"/>
               </a:rPr>
-              <a:t>22</a:t>
+              <a:t>410,865</a:t>
             </a:r>
             <a:endParaRPr lang="en-US" sz="4400" dirty="0"/>
           </a:p>
@@ -5286,13 +6322,13 @@
             <a:r>
               <a:rPr lang="en-US" sz="1400" dirty="0">
                 <a:solidFill>
-                  <a:srgbClr val="4A5568"/>
+                  <a:srgbClr val="D5DBE7"/>
                 </a:solidFill>
                 <a:latin typeface="IBM Plex Sans" pitchFamily="34" charset="0"/>
                 <a:ea typeface="IBM Plex Sans" pitchFamily="34" charset="-122"/>
                 <a:cs typeface="IBM Plex Sans" pitchFamily="34" charset="-120"/>
               </a:rPr>
-              <a:t>columns in five groups</a:t>
+              <a:t>loans analysed, issued 2023–2025</a:t>
             </a:r>
             <a:endParaRPr lang="en-US" sz="1400" dirty="0"/>
           </a:p>
@@ -5358,7 +6394,7 @@
                 <a:ea typeface="Source Serif 4" pitchFamily="18" charset="-122"/>
                 <a:cs typeface="Source Serif 4" pitchFamily="18" charset="-120"/>
               </a:rPr>
-              <a:t>2009–2026</a:t>
+              <a:t>22 · 8</a:t>
             </a:r>
             <a:endParaRPr lang="en-US" sz="4400" dirty="0"/>
           </a:p>
@@ -5402,7 +6438,7 @@
                 <a:ea typeface="IBM Plex Sans" pitchFamily="34" charset="-122"/>
                 <a:cs typeface="IBM Plex Sans" pitchFamily="34" charset="-120"/>
               </a:rPr>
-              <a:t>loan issue dates</a:t>
+              <a:t>columns · countries</a:t>
             </a:r>
             <a:endParaRPr lang="en-US" sz="1400" dirty="0"/>
           </a:p>
@@ -5417,7 +6453,7 @@
         <p:spPr>
           <a:xfrm>
             <a:off x="812800" y="3815082"/>
-            <a:ext cx="10883392" cy="614680"/>
+            <a:ext cx="10883392" cy="577850"/>
           </a:xfrm>
           <a:prstGeom prst="rect">
             <a:avLst/>
@@ -5433,12 +6469,12 @@
           <a:p>
             <a:pPr algn="l" indent="0" marL="0">
               <a:lnSpc>
-                <a:spcPts val="2320"/>
+                <a:spcPts val="2175"/>
               </a:lnSpc>
               <a:buNone/>
             </a:pPr>
             <a:r>
-              <a:rPr lang="en-US" sz="1600" b="1" dirty="0">
+              <a:rPr lang="en-US" sz="1500" b="1" dirty="0">
                 <a:solidFill>
                   <a:srgbClr val="14213D"/>
                 </a:solidFill>
@@ -5446,10 +6482,10 @@
                 <a:ea typeface="IBM Plex Sans" pitchFamily="34" charset="-122"/>
                 <a:cs typeface="IBM Plex Sans" pitchFamily="34" charset="-120"/>
               </a:rPr>
-              <a:t>Source:</a:t>
-            </a:r>
-            <a:r>
-              <a:rPr lang="en-US" sz="1600" dirty="0">
+              <a:t>Why 2023–2025:</a:t>
+            </a:r>
+            <a:r>
+              <a:rPr lang="en-US" sz="1500" dirty="0">
                 <a:solidFill>
                   <a:srgbClr val="14213D"/>
                 </a:solidFill>
@@ -5457,21 +6493,54 @@
                 <a:ea typeface="IBM Plex Sans" pitchFamily="34" charset="-122"/>
                 <a:cs typeface="IBM Plex Sans" pitchFamily="34" charset="-120"/>
               </a:rPr>
-              <a:t> Go &amp; Grow public statistics page, file </a:t>
-            </a:r>
-            <a:r>
-              <a:rPr lang="en-US" sz="1600" i="1" dirty="0">
-                <a:solidFill>
-                  <a:srgbClr val="14213D"/>
+              <a:t> </a:t>
+            </a:r>
+            <a:r>
+              <a:rPr lang="en-US" sz="1500" dirty="0">
+                <a:solidFill>
+                  <a:srgbClr val="4A5568"/>
                 </a:solidFill>
                 <a:latin typeface="IBM Plex Sans" pitchFamily="34" charset="0"/>
                 <a:ea typeface="IBM Plex Sans" pitchFamily="34" charset="-122"/>
                 <a:cs typeface="IBM Plex Sans" pitchFamily="34" charset="-120"/>
               </a:rPr>
-              <a:t>loan_dataset_investor.xlsx</a:t>
-            </a:r>
-            <a:r>
-              <a:rPr lang="en-US" sz="1600" dirty="0">
+              <a:t>income and risk rating are only recorded from 2023 on, and loans from 2026 are too young to show whether they default.</a:t>
+            </a:r>
+            <a:endParaRPr lang="en-US" sz="1500" dirty="0"/>
+          </a:p>
+        </p:txBody>
+      </p:sp>
+      <p:sp>
+        <p:nvSpPr>
+          <p:cNvPr id="14" name="Text 12"/>
+          <p:cNvSpPr/>
+          <p:nvPr/>
+        </p:nvSpPr>
+        <p:spPr>
+          <a:xfrm>
+            <a:off x="812800" y="4469132"/>
+            <a:ext cx="10883392" cy="301625"/>
+          </a:xfrm>
+          <a:prstGeom prst="rect">
+            <a:avLst/>
+          </a:prstGeom>
+          <a:noFill/>
+          <a:ln/>
+        </p:spPr>
+        <p:txBody>
+          <a:bodyPr wrap="square" lIns="0" tIns="0" rIns="0" bIns="0" rtlCol="0" anchor="t">
+            <a:normAutofit/>
+          </a:bodyPr>
+          <a:lstStyle/>
+          <a:p>
+            <a:pPr algn="l" indent="0" marL="0">
+              <a:lnSpc>
+                <a:spcPts val="2175"/>
+              </a:lnSpc>
+              <a:buNone/>
+            </a:pPr>
+            <a:r>
+              <a:rPr lang="en-US" sz="1500" b="1" dirty="0">
                 <a:solidFill>
                   <a:srgbClr val="14213D"/>
                 </a:solidFill>
@@ -5479,43 +6548,10 @@
                 <a:ea typeface="IBM Plex Sans" pitchFamily="34" charset="-122"/>
                 <a:cs typeface="IBM Plex Sans" pitchFamily="34" charset="-120"/>
               </a:rPr>
-              <a:t> (team’s modified version), with a data dictionary sheet.</a:t>
-            </a:r>
-            <a:endParaRPr lang="en-US" sz="1600" dirty="0"/>
-          </a:p>
-        </p:txBody>
-      </p:sp>
-      <p:sp>
-        <p:nvSpPr>
-          <p:cNvPr id="14" name="Text 12"/>
-          <p:cNvSpPr/>
-          <p:nvPr/>
-        </p:nvSpPr>
-        <p:spPr>
-          <a:xfrm>
-            <a:off x="812800" y="4505961"/>
-            <a:ext cx="10883392" cy="320040"/>
-          </a:xfrm>
-          <a:prstGeom prst="rect">
-            <a:avLst/>
-          </a:prstGeom>
-          <a:noFill/>
-          <a:ln/>
-        </p:spPr>
-        <p:txBody>
-          <a:bodyPr wrap="square" lIns="0" tIns="0" rIns="0" bIns="0" rtlCol="0" anchor="t">
-            <a:normAutofit/>
-          </a:bodyPr>
-          <a:lstStyle/>
-          <a:p>
-            <a:pPr algn="l" indent="0" marL="0">
-              <a:lnSpc>
-                <a:spcPts val="2320"/>
-              </a:lnSpc>
-              <a:buNone/>
-            </a:pPr>
-            <a:r>
-              <a:rPr lang="en-US" sz="1600" b="1" dirty="0">
+              <a:t>Source:</a:t>
+            </a:r>
+            <a:r>
+              <a:rPr lang="en-US" sz="1500" dirty="0">
                 <a:solidFill>
                   <a:srgbClr val="14213D"/>
                 </a:solidFill>
@@ -5523,10 +6559,10 @@
                 <a:ea typeface="IBM Plex Sans" pitchFamily="34" charset="-122"/>
                 <a:cs typeface="IBM Plex Sans" pitchFamily="34" charset="-120"/>
               </a:rPr>
-              <a:t>Groups:</a:t>
-            </a:r>
-            <a:r>
-              <a:rPr lang="en-US" sz="1600" dirty="0">
+              <a:t> </a:t>
+            </a:r>
+            <a:r>
+              <a:rPr lang="en-US" sz="1500" dirty="0">
                 <a:solidFill>
                   <a:srgbClr val="4A5568"/>
                 </a:solidFill>
@@ -5534,9 +6570,31 @@
                 <a:ea typeface="IBM Plex Sans" pitchFamily="34" charset="-122"/>
                 <a:cs typeface="IBM Plex Sans" pitchFamily="34" charset="-120"/>
               </a:rPr>
-              <a:t> borrower · loan terms · timing · repayment · default outcomes</a:t>
-            </a:r>
-            <a:endParaRPr lang="en-US" sz="1600" dirty="0"/>
+              <a:t>Go &amp; Grow public statistics page, file </a:t>
+            </a:r>
+            <a:r>
+              <a:rPr lang="en-US" sz="1500" i="1" dirty="0">
+                <a:solidFill>
+                  <a:srgbClr val="4A5568"/>
+                </a:solidFill>
+                <a:latin typeface="IBM Plex Sans" pitchFamily="34" charset="0"/>
+                <a:ea typeface="IBM Plex Sans" pitchFamily="34" charset="-122"/>
+                <a:cs typeface="IBM Plex Sans" pitchFamily="34" charset="-120"/>
+              </a:rPr>
+              <a:t>Modified_loan_dataset_investor.xlsx</a:t>
+            </a:r>
+            <a:r>
+              <a:rPr lang="en-US" sz="1500" dirty="0">
+                <a:solidFill>
+                  <a:srgbClr val="4A5568"/>
+                </a:solidFill>
+                <a:latin typeface="IBM Plex Sans" pitchFamily="34" charset="0"/>
+                <a:ea typeface="IBM Plex Sans" pitchFamily="34" charset="-122"/>
+                <a:cs typeface="IBM Plex Sans" pitchFamily="34" charset="-120"/>
+              </a:rPr>
+              <a:t>, with a data dictionary sheet.</a:t>
+            </a:r>
+            <a:endParaRPr lang="en-US" sz="1500" dirty="0"/>
           </a:p>
         </p:txBody>
       </p:sp>
@@ -5698,7 +6756,7 @@
                 <a:ea typeface="IBM Plex Sans" pitchFamily="34" charset="-122"/>
                 <a:cs typeface="IBM Plex Sans" pitchFamily="34" charset="-120"/>
               </a:rPr>
-              <a:t>PIPELINE DRAFT</a:t>
+              <a:t>PIPELINE</a:t>
             </a:r>
             <a:endParaRPr lang="en-US" sz="1200" dirty="0"/>
           </a:p>
@@ -5976,7 +7034,7 @@
                 <a:ea typeface="IBM Plex Sans" pitchFamily="34" charset="-122"/>
                 <a:cs typeface="IBM Plex Sans" pitchFamily="34" charset="-120"/>
               </a:rPr>
-              <a:t>Read Excel with pandas, save as Parquet for fast reloads</a:t>
+              <a:t>Excel → pandas → Parquet for fast reloads</a:t>
             </a:r>
             <a:endParaRPr lang="en-US" sz="1400" dirty="0"/>
           </a:p>
@@ -6061,7 +7119,7 @@
         <p:spPr>
           <a:xfrm>
             <a:off x="4631214" y="2247900"/>
-            <a:ext cx="1138238" cy="299720"/>
+            <a:ext cx="1065276" cy="299720"/>
           </a:xfrm>
           <a:prstGeom prst="rect">
             <a:avLst/>
@@ -6090,7 +7148,7 @@
                 <a:ea typeface="IBM Plex Sans" pitchFamily="34" charset="-122"/>
                 <a:cs typeface="IBM Plex Sans" pitchFamily="34" charset="-120"/>
               </a:rPr>
-              <a:t>2 · Types</a:t>
+              <a:t>2 · Filter</a:t>
             </a:r>
             <a:endParaRPr lang="en-US" sz="1800" dirty="0"/>
           </a:p>
@@ -6208,7 +7266,7 @@
                 <a:ea typeface="IBM Plex Sans" pitchFamily="34" charset="-122"/>
                 <a:cs typeface="IBM Plex Sans" pitchFamily="34" charset="-120"/>
               </a:rPr>
-              <a:t>Categories, 0/1 flags, ordered rating AA → HR</a:t>
+              <a:t>Keep 2023–2025: 843,755 → 410,865 loans</a:t>
             </a:r>
             <a:endParaRPr lang="en-US" sz="1400" dirty="0"/>
           </a:p>
@@ -6279,7 +7337,7 @@
             </a:pathLst>
           </a:custGeom>
           <a:solidFill>
-            <a:srgbClr val="C2571B"/>
+            <a:srgbClr val="14213D"/>
           </a:solidFill>
           <a:ln/>
         </p:spPr>
@@ -6336,7 +7394,239 @@
         </p:nvSpPr>
         <p:spPr>
           <a:xfrm>
-            <a:off x="10117217" y="2240282"/>
+            <a:off x="10556478" y="2240282"/>
+            <a:ext cx="594122" cy="289560"/>
+          </a:xfrm>
+          <a:custGeom>
+            <a:avLst/>
+            <a:gdLst/>
+            <a:ahLst/>
+            <a:cxnLst/>
+            <a:rect l="l" t="t" r="r" b="b"/>
+            <a:pathLst>
+              <a:path w="594122" h="289560">
+                <a:moveTo>
+                  <a:pt x="144780" y="0"/>
+                </a:moveTo>
+                <a:lnTo>
+                  <a:pt x="449342" y="0"/>
+                </a:lnTo>
+                <a:arcTo hR="144780" wR="144780" stAng="16200000" swAng="5400000"/>
+                <a:lnTo>
+                  <a:pt x="594122" y="144780"/>
+                </a:lnTo>
+                <a:arcTo hR="144780" wR="144780" stAng="0" swAng="5400000"/>
+                <a:lnTo>
+                  <a:pt x="144780" y="289560"/>
+                </a:lnTo>
+                <a:arcTo hR="144780" wR="144780" stAng="5400000" swAng="5400000"/>
+                <a:lnTo>
+                  <a:pt x="0" y="144780"/>
+                </a:lnTo>
+                <a:arcTo hR="144780" wR="144780" stAng="10800000" swAng="5400000"/>
+                <a:close/>
+              </a:path>
+            </a:pathLst>
+          </a:custGeom>
+          <a:solidFill>
+            <a:srgbClr val="14213D"/>
+          </a:solidFill>
+          <a:ln/>
+        </p:spPr>
+        <p:txBody>
+          <a:bodyPr wrap="none" lIns="0" tIns="0" rIns="0" bIns="0" rtlCol="0" anchor="ctr">
+            <a:normAutofit/>
+          </a:bodyPr>
+          <a:lstStyle/>
+          <a:p>
+            <a:pPr algn="ctr" indent="0" marL="0">
+              <a:lnSpc>
+                <a:spcPts val="1680"/>
+              </a:lnSpc>
+              <a:buNone/>
+            </a:pPr>
+            <a:r>
+              <a:rPr lang="en-US" sz="1200" b="1" dirty="0">
+                <a:solidFill>
+                  <a:srgbClr val="F6F4EE"/>
+                </a:solidFill>
+                <a:latin typeface="IBM Plex Sans" pitchFamily="34" charset="0"/>
+                <a:ea typeface="IBM Plex Sans" pitchFamily="34" charset="-122"/>
+                <a:cs typeface="IBM Plex Sans" pitchFamily="34" charset="-120"/>
+              </a:rPr>
+              <a:t>Done</a:t>
+            </a:r>
+            <a:endParaRPr lang="en-US" sz="1200" dirty="0"/>
+          </a:p>
+        </p:txBody>
+      </p:sp>
+      <p:sp>
+        <p:nvSpPr>
+          <p:cNvPr id="18" name="Text 16"/>
+          <p:cNvSpPr/>
+          <p:nvPr/>
+        </p:nvSpPr>
+        <p:spPr>
+          <a:xfrm>
+            <a:off x="8221107" y="2618739"/>
+            <a:ext cx="3017378" cy="523240"/>
+          </a:xfrm>
+          <a:prstGeom prst="rect">
+            <a:avLst/>
+          </a:prstGeom>
+          <a:noFill/>
+          <a:ln/>
+        </p:spPr>
+        <p:txBody>
+          <a:bodyPr wrap="square" lIns="0" tIns="0" rIns="0" bIns="0" rtlCol="0" anchor="t">
+            <a:normAutofit/>
+          </a:bodyPr>
+          <a:lstStyle/>
+          <a:p>
+            <a:pPr algn="l" indent="0" marL="0">
+              <a:lnSpc>
+                <a:spcPts val="1960"/>
+              </a:lnSpc>
+              <a:buNone/>
+            </a:pPr>
+            <a:r>
+              <a:rPr lang="en-US" sz="1400" dirty="0">
+                <a:solidFill>
+                  <a:srgbClr val="4A5568"/>
+                </a:solidFill>
+                <a:latin typeface="IBM Plex Sans" pitchFamily="34" charset="0"/>
+                <a:ea typeface="IBM Plex Sans" pitchFamily="34" charset="-122"/>
+                <a:cs typeface="IBM Plex Sans" pitchFamily="34" charset="-120"/>
+              </a:rPr>
+              <a:t>Fix types, explain every gap, flag cancelled and unrated loans</a:t>
+            </a:r>
+            <a:endParaRPr lang="en-US" sz="1400" dirty="0"/>
+          </a:p>
+        </p:txBody>
+      </p:sp>
+      <p:sp>
+        <p:nvSpPr>
+          <p:cNvPr id="19" name="Shape 17"/>
+          <p:cNvSpPr/>
+          <p:nvPr/>
+        </p:nvSpPr>
+        <p:spPr>
+          <a:xfrm>
+            <a:off x="812800" y="3548382"/>
+            <a:ext cx="3386614" cy="1384300"/>
+          </a:xfrm>
+          <a:prstGeom prst="roundRect">
+            <a:avLst>
+              <a:gd name="adj" fmla="val 7339"/>
+            </a:avLst>
+          </a:prstGeom>
+          <a:solidFill>
+            <a:srgbClr val="F6F4EE"/>
+          </a:solidFill>
+          <a:ln/>
+        </p:spPr>
+      </p:sp>
+      <p:sp>
+        <p:nvSpPr>
+          <p:cNvPr id="20" name="Shape 18"/>
+          <p:cNvSpPr/>
+          <p:nvPr/>
+        </p:nvSpPr>
+        <p:spPr>
+          <a:xfrm>
+            <a:off x="812800" y="3548382"/>
+            <a:ext cx="3386614" cy="1384300"/>
+          </a:xfrm>
+          <a:custGeom>
+            <a:avLst/>
+            <a:gdLst/>
+            <a:ahLst/>
+            <a:cxnLst/>
+            <a:rect l="l" t="t" r="r" b="b"/>
+            <a:pathLst>
+              <a:path w="3386614" h="1384300">
+                <a:moveTo>
+                  <a:pt x="0" y="101600"/>
+                </a:moveTo>
+                <a:lnTo>
+                  <a:pt x="0" y="101600"/>
+                </a:lnTo>
+                <a:arcTo hR="101600" wR="101600" stAng="10800000" swAng="5400000"/>
+                <a:lnTo>
+                  <a:pt x="3285014" y="0"/>
+                </a:lnTo>
+                <a:arcTo hR="101600" wR="101600" stAng="16200000" swAng="5400000"/>
+                <a:lnTo>
+                  <a:pt x="3386614" y="101600"/>
+                </a:lnTo>
+                <a:arcTo hR="50800" wR="101600" stAng="0" swAng="-5400000"/>
+                <a:lnTo>
+                  <a:pt x="101600" y="50800"/>
+                </a:lnTo>
+                <a:arcTo hR="50800" wR="101600" stAng="16200000" swAng="-5400000"/>
+                <a:close/>
+              </a:path>
+            </a:pathLst>
+          </a:custGeom>
+          <a:solidFill>
+            <a:srgbClr val="C2571B"/>
+          </a:solidFill>
+          <a:ln/>
+        </p:spPr>
+      </p:sp>
+      <p:sp>
+        <p:nvSpPr>
+          <p:cNvPr id="21" name="Text 19"/>
+          <p:cNvSpPr/>
+          <p:nvPr/>
+        </p:nvSpPr>
+        <p:spPr>
+          <a:xfrm>
+            <a:off x="1041400" y="3835400"/>
+            <a:ext cx="1003649" cy="299720"/>
+          </a:xfrm>
+          <a:prstGeom prst="rect">
+            <a:avLst/>
+          </a:prstGeom>
+          <a:noFill/>
+          <a:ln/>
+        </p:spPr>
+        <p:txBody>
+          <a:bodyPr wrap="square" lIns="0" tIns="0" rIns="0" bIns="0" rtlCol="0" anchor="t">
+            <a:normAutofit/>
+          </a:bodyPr>
+          <a:lstStyle/>
+          <a:p>
+            <a:pPr algn="l" indent="0" marL="0">
+              <a:lnSpc>
+                <a:spcPts val="2160"/>
+              </a:lnSpc>
+              <a:buNone/>
+            </a:pPr>
+            <a:r>
+              <a:rPr lang="en-US" sz="1800" b="1" dirty="0">
+                <a:solidFill>
+                  <a:srgbClr val="14213D"/>
+                </a:solidFill>
+                <a:latin typeface="IBM Plex Sans" pitchFamily="34" charset="0"/>
+                <a:ea typeface="IBM Plex Sans" pitchFamily="34" charset="-122"/>
+                <a:cs typeface="IBM Plex Sans" pitchFamily="34" charset="-120"/>
+              </a:rPr>
+              <a:t>4 · KPIs</a:t>
+            </a:r>
+            <a:endParaRPr lang="en-US" sz="1800" dirty="0"/>
+          </a:p>
+        </p:txBody>
+      </p:sp>
+      <p:sp>
+        <p:nvSpPr>
+          <p:cNvPr id="22" name="Text 20"/>
+          <p:cNvSpPr/>
+          <p:nvPr/>
+        </p:nvSpPr>
+        <p:spPr>
+          <a:xfrm>
+            <a:off x="2937431" y="3827782"/>
             <a:ext cx="1033383" cy="289560"/>
           </a:xfrm>
           <a:custGeom>
@@ -6404,14 +7694,14 @@
       </p:sp>
       <p:sp>
         <p:nvSpPr>
-          <p:cNvPr id="18" name="Text 16"/>
-          <p:cNvSpPr/>
-          <p:nvPr/>
-        </p:nvSpPr>
-        <p:spPr>
-          <a:xfrm>
-            <a:off x="8221107" y="2618739"/>
-            <a:ext cx="3017378" cy="523240"/>
+          <p:cNvPr id="23" name="Text 21"/>
+          <p:cNvSpPr/>
+          <p:nvPr/>
+        </p:nvSpPr>
+        <p:spPr>
+          <a:xfrm>
+            <a:off x="1041400" y="4206239"/>
+            <a:ext cx="3017296" cy="523240"/>
           </a:xfrm>
           <a:prstGeom prst="rect">
             <a:avLst/>
@@ -6440,7 +7730,7 @@
                 <a:ea typeface="IBM Plex Sans" pitchFamily="34" charset="-122"/>
                 <a:cs typeface="IBM Plex Sans" pitchFamily="34" charset="-120"/>
               </a:rPr>
-              <a:t>Drop unusable columns, decide on each missing-value case</a:t>
+              <a:t>Default rate by rating done; other segments next</a:t>
             </a:r>
             <a:endParaRPr lang="en-US" sz="1400" dirty="0"/>
           </a:p>
@@ -6448,18 +7738,18 @@
       </p:sp>
       <p:sp>
         <p:nvSpPr>
-          <p:cNvPr id="19" name="Shape 17"/>
-          <p:cNvSpPr/>
-          <p:nvPr/>
-        </p:nvSpPr>
-        <p:spPr>
-          <a:xfrm>
-            <a:off x="812800" y="3548382"/>
-            <a:ext cx="3386614" cy="1379220"/>
+          <p:cNvPr id="24" name="Shape 22"/>
+          <p:cNvSpPr/>
+          <p:nvPr/>
+        </p:nvSpPr>
+        <p:spPr>
+          <a:xfrm>
+            <a:off x="4402614" y="3548382"/>
+            <a:ext cx="3386693" cy="1384300"/>
           </a:xfrm>
           <a:prstGeom prst="roundRect">
             <a:avLst>
-              <a:gd name="adj" fmla="val 7366"/>
+              <a:gd name="adj" fmla="val 7339"/>
             </a:avLst>
           </a:prstGeom>
           <a:solidFill>
@@ -6470,14 +7760,14 @@
       </p:sp>
       <p:sp>
         <p:nvSpPr>
-          <p:cNvPr id="20" name="Shape 18"/>
-          <p:cNvSpPr/>
-          <p:nvPr/>
-        </p:nvSpPr>
-        <p:spPr>
-          <a:xfrm>
-            <a:off x="812800" y="3548382"/>
-            <a:ext cx="3386614" cy="1379220"/>
+          <p:cNvPr id="25" name="Shape 23"/>
+          <p:cNvSpPr/>
+          <p:nvPr/>
+        </p:nvSpPr>
+        <p:spPr>
+          <a:xfrm>
+            <a:off x="4402614" y="3548382"/>
+            <a:ext cx="3386693" cy="1384300"/>
           </a:xfrm>
           <a:custGeom>
             <a:avLst/>
@@ -6486,7 +7776,7 @@
             <a:cxnLst/>
             <a:rect l="l" t="t" r="r" b="b"/>
             <a:pathLst>
-              <a:path w="3386614" h="1379220">
+              <a:path w="3386693" h="1384300">
                 <a:moveTo>
                   <a:pt x="0" y="101600"/>
                 </a:moveTo>
@@ -6495,11 +7785,11 @@
                 </a:lnTo>
                 <a:arcTo hR="101600" wR="101600" stAng="10800000" swAng="5400000"/>
                 <a:lnTo>
-                  <a:pt x="3285014" y="0"/>
+                  <a:pt x="3285093" y="0"/>
                 </a:lnTo>
                 <a:arcTo hR="101600" wR="101600" stAng="16200000" swAng="5400000"/>
                 <a:lnTo>
-                  <a:pt x="3386614" y="101600"/>
+                  <a:pt x="3386693" y="101600"/>
                 </a:lnTo>
                 <a:arcTo hR="50800" wR="101600" stAng="0" swAng="-5400000"/>
                 <a:lnTo>
@@ -6518,14 +7808,14 @@
       </p:sp>
       <p:sp>
         <p:nvSpPr>
-          <p:cNvPr id="21" name="Text 19"/>
-          <p:cNvSpPr/>
-          <p:nvPr/>
-        </p:nvSpPr>
-        <p:spPr>
-          <a:xfrm>
-            <a:off x="1041400" y="3832861"/>
-            <a:ext cx="1362837" cy="299720"/>
+          <p:cNvPr id="26" name="Text 24"/>
+          <p:cNvSpPr/>
+          <p:nvPr/>
+        </p:nvSpPr>
+        <p:spPr>
+          <a:xfrm>
+            <a:off x="4631214" y="3832861"/>
+            <a:ext cx="2024539" cy="299720"/>
           </a:xfrm>
           <a:prstGeom prst="rect">
             <a:avLst/>
@@ -6554,7 +7844,7 @@
                 <a:ea typeface="IBM Plex Sans" pitchFamily="34" charset="-122"/>
                 <a:cs typeface="IBM Plex Sans" pitchFamily="34" charset="-120"/>
               </a:rPr>
-              <a:t>4 · Explore</a:t>
+              <a:t>5 · SQL &amp; charts</a:t>
             </a:r>
             <a:endParaRPr lang="en-US" sz="1800" dirty="0"/>
           </a:p>
@@ -6562,13 +7852,13 @@
       </p:sp>
       <p:sp>
         <p:nvSpPr>
-          <p:cNvPr id="22" name="Text 20"/>
-          <p:cNvSpPr/>
-          <p:nvPr/>
-        </p:nvSpPr>
-        <p:spPr>
-          <a:xfrm>
-            <a:off x="3421380" y="3834132"/>
+          <p:cNvPr id="27" name="Text 25"/>
+          <p:cNvSpPr/>
+          <p:nvPr/>
+        </p:nvSpPr>
+        <p:spPr>
+          <a:xfrm>
+            <a:off x="7011274" y="3834132"/>
             <a:ext cx="543084" cy="271780"/>
           </a:xfrm>
           <a:custGeom>
@@ -6639,14 +7929,14 @@
       </p:sp>
       <p:sp>
         <p:nvSpPr>
-          <p:cNvPr id="23" name="Text 21"/>
-          <p:cNvSpPr/>
-          <p:nvPr/>
-        </p:nvSpPr>
-        <p:spPr>
-          <a:xfrm>
-            <a:off x="1041400" y="4201161"/>
-            <a:ext cx="3017296" cy="523240"/>
+          <p:cNvPr id="28" name="Text 26"/>
+          <p:cNvSpPr/>
+          <p:nvPr/>
+        </p:nvSpPr>
+        <p:spPr>
+          <a:xfrm>
+            <a:off x="4631214" y="4201161"/>
+            <a:ext cx="3017378" cy="523240"/>
           </a:xfrm>
           <a:prstGeom prst="rect">
             <a:avLst/>
@@ -6675,7 +7965,7 @@
                 <a:ea typeface="IBM Plex Sans" pitchFamily="34" charset="-122"/>
                 <a:cs typeface="IBM Plex Sans" pitchFamily="34" charset="-120"/>
               </a:rPr>
-              <a:t>Distributions of amount, rate, duration, income</a:t>
+              <a:t>Data warehouse and SQL, seaborn and Tableau</a:t>
             </a:r>
             <a:endParaRPr lang="en-US" sz="1400" dirty="0"/>
           </a:p>
@@ -6683,18 +7973,18 @@
       </p:sp>
       <p:sp>
         <p:nvSpPr>
-          <p:cNvPr id="24" name="Shape 22"/>
-          <p:cNvSpPr/>
-          <p:nvPr/>
-        </p:nvSpPr>
-        <p:spPr>
-          <a:xfrm>
-            <a:off x="4402614" y="3548382"/>
-            <a:ext cx="3386693" cy="1379220"/>
+          <p:cNvPr id="29" name="Shape 27"/>
+          <p:cNvSpPr/>
+          <p:nvPr/>
+        </p:nvSpPr>
+        <p:spPr>
+          <a:xfrm>
+            <a:off x="7992507" y="3548382"/>
+            <a:ext cx="3386693" cy="1384300"/>
           </a:xfrm>
           <a:prstGeom prst="roundRect">
             <a:avLst>
-              <a:gd name="adj" fmla="val 7366"/>
+              <a:gd name="adj" fmla="val 7339"/>
             </a:avLst>
           </a:prstGeom>
           <a:solidFill>
@@ -6705,14 +7995,14 @@
       </p:sp>
       <p:sp>
         <p:nvSpPr>
-          <p:cNvPr id="25" name="Shape 23"/>
-          <p:cNvSpPr/>
-          <p:nvPr/>
-        </p:nvSpPr>
-        <p:spPr>
-          <a:xfrm>
-            <a:off x="4402614" y="3548382"/>
-            <a:ext cx="3386693" cy="1379220"/>
+          <p:cNvPr id="30" name="Shape 28"/>
+          <p:cNvSpPr/>
+          <p:nvPr/>
+        </p:nvSpPr>
+        <p:spPr>
+          <a:xfrm>
+            <a:off x="7992507" y="3548382"/>
+            <a:ext cx="3386693" cy="1384300"/>
           </a:xfrm>
           <a:custGeom>
             <a:avLst/>
@@ -6721,7 +8011,7 @@
             <a:cxnLst/>
             <a:rect l="l" t="t" r="r" b="b"/>
             <a:pathLst>
-              <a:path w="3386693" h="1379220">
+              <a:path w="3386693" h="1384300">
                 <a:moveTo>
                   <a:pt x="0" y="101600"/>
                 </a:moveTo>
@@ -6753,14 +8043,14 @@
       </p:sp>
       <p:sp>
         <p:nvSpPr>
-          <p:cNvPr id="26" name="Text 24"/>
-          <p:cNvSpPr/>
-          <p:nvPr/>
-        </p:nvSpPr>
-        <p:spPr>
-          <a:xfrm>
-            <a:off x="4631214" y="3832861"/>
-            <a:ext cx="1520571" cy="299720"/>
+          <p:cNvPr id="31" name="Text 29"/>
+          <p:cNvSpPr/>
+          <p:nvPr/>
+        </p:nvSpPr>
+        <p:spPr>
+          <a:xfrm>
+            <a:off x="8221107" y="3832861"/>
+            <a:ext cx="1247966" cy="299720"/>
           </a:xfrm>
           <a:prstGeom prst="rect">
             <a:avLst/>
@@ -6789,7 +8079,7 @@
                 <a:ea typeface="IBM Plex Sans" pitchFamily="34" charset="-122"/>
                 <a:cs typeface="IBM Plex Sans" pitchFamily="34" charset="-120"/>
               </a:rPr>
-              <a:t>5 · Segment</a:t>
+              <a:t>6 · Advise</a:t>
             </a:r>
             <a:endParaRPr lang="en-US" sz="1800" dirty="0"/>
           </a:p>
@@ -6797,13 +8087,13 @@
       </p:sp>
       <p:sp>
         <p:nvSpPr>
-          <p:cNvPr id="27" name="Text 25"/>
-          <p:cNvSpPr/>
-          <p:nvPr/>
-        </p:nvSpPr>
-        <p:spPr>
-          <a:xfrm>
-            <a:off x="7011274" y="3834132"/>
+          <p:cNvPr id="32" name="Text 30"/>
+          <p:cNvSpPr/>
+          <p:nvPr/>
+        </p:nvSpPr>
+        <p:spPr>
+          <a:xfrm>
+            <a:off x="10601166" y="3834132"/>
             <a:ext cx="543084" cy="271780"/>
           </a:xfrm>
           <a:custGeom>
@@ -6874,13 +8164,13 @@
       </p:sp>
       <p:sp>
         <p:nvSpPr>
-          <p:cNvPr id="28" name="Text 26"/>
-          <p:cNvSpPr/>
-          <p:nvPr/>
-        </p:nvSpPr>
-        <p:spPr>
-          <a:xfrm>
-            <a:off x="4631214" y="4201161"/>
+          <p:cNvPr id="33" name="Text 31"/>
+          <p:cNvSpPr/>
+          <p:nvPr/>
+        </p:nvSpPr>
+        <p:spPr>
+          <a:xfrm>
+            <a:off x="8221107" y="4201161"/>
             <a:ext cx="3017378" cy="523240"/>
           </a:xfrm>
           <a:prstGeom prst="rect">
@@ -6910,242 +8200,7 @@
                 <a:ea typeface="IBM Plex Sans" pitchFamily="34" charset="-122"/>
                 <a:cs typeface="IBM Plex Sans" pitchFamily="34" charset="-120"/>
               </a:rPr>
-              <a:t>Default rate by rating, country, income, amount, rate, duration</a:t>
-            </a:r>
-            <a:endParaRPr lang="en-US" sz="1400" dirty="0"/>
-          </a:p>
-        </p:txBody>
-      </p:sp>
-      <p:sp>
-        <p:nvSpPr>
-          <p:cNvPr id="29" name="Shape 27"/>
-          <p:cNvSpPr/>
-          <p:nvPr/>
-        </p:nvSpPr>
-        <p:spPr>
-          <a:xfrm>
-            <a:off x="7992507" y="3548382"/>
-            <a:ext cx="3386693" cy="1379220"/>
-          </a:xfrm>
-          <a:prstGeom prst="roundRect">
-            <a:avLst>
-              <a:gd name="adj" fmla="val 7366"/>
-            </a:avLst>
-          </a:prstGeom>
-          <a:solidFill>
-            <a:srgbClr val="F6F4EE"/>
-          </a:solidFill>
-          <a:ln/>
-        </p:spPr>
-      </p:sp>
-      <p:sp>
-        <p:nvSpPr>
-          <p:cNvPr id="30" name="Shape 28"/>
-          <p:cNvSpPr/>
-          <p:nvPr/>
-        </p:nvSpPr>
-        <p:spPr>
-          <a:xfrm>
-            <a:off x="7992507" y="3548382"/>
-            <a:ext cx="3386693" cy="1379220"/>
-          </a:xfrm>
-          <a:custGeom>
-            <a:avLst/>
-            <a:gdLst/>
-            <a:ahLst/>
-            <a:cxnLst/>
-            <a:rect l="l" t="t" r="r" b="b"/>
-            <a:pathLst>
-              <a:path w="3386693" h="1379220">
-                <a:moveTo>
-                  <a:pt x="0" y="101600"/>
-                </a:moveTo>
-                <a:lnTo>
-                  <a:pt x="0" y="101600"/>
-                </a:lnTo>
-                <a:arcTo hR="101600" wR="101600" stAng="10800000" swAng="5400000"/>
-                <a:lnTo>
-                  <a:pt x="3285093" y="0"/>
-                </a:lnTo>
-                <a:arcTo hR="101600" wR="101600" stAng="16200000" swAng="5400000"/>
-                <a:lnTo>
-                  <a:pt x="3386693" y="101600"/>
-                </a:lnTo>
-                <a:arcTo hR="50800" wR="101600" stAng="0" swAng="-5400000"/>
-                <a:lnTo>
-                  <a:pt x="101600" y="50800"/>
-                </a:lnTo>
-                <a:arcTo hR="50800" wR="101600" stAng="16200000" swAng="-5400000"/>
-                <a:close/>
-              </a:path>
-            </a:pathLst>
-          </a:custGeom>
-          <a:solidFill>
-            <a:srgbClr val="A9A391"/>
-          </a:solidFill>
-          <a:ln/>
-        </p:spPr>
-      </p:sp>
-      <p:sp>
-        <p:nvSpPr>
-          <p:cNvPr id="31" name="Text 29"/>
-          <p:cNvSpPr/>
-          <p:nvPr/>
-        </p:nvSpPr>
-        <p:spPr>
-          <a:xfrm>
-            <a:off x="8221107" y="3832861"/>
-            <a:ext cx="1247966" cy="299720"/>
-          </a:xfrm>
-          <a:prstGeom prst="rect">
-            <a:avLst/>
-          </a:prstGeom>
-          <a:noFill/>
-          <a:ln/>
-        </p:spPr>
-        <p:txBody>
-          <a:bodyPr wrap="square" lIns="0" tIns="0" rIns="0" bIns="0" rtlCol="0" anchor="t">
-            <a:normAutofit/>
-          </a:bodyPr>
-          <a:lstStyle/>
-          <a:p>
-            <a:pPr algn="l" indent="0" marL="0">
-              <a:lnSpc>
-                <a:spcPts val="2160"/>
-              </a:lnSpc>
-              <a:buNone/>
-            </a:pPr>
-            <a:r>
-              <a:rPr lang="en-US" sz="1800" b="1" dirty="0">
-                <a:solidFill>
-                  <a:srgbClr val="14213D"/>
-                </a:solidFill>
-                <a:latin typeface="IBM Plex Sans" pitchFamily="34" charset="0"/>
-                <a:ea typeface="IBM Plex Sans" pitchFamily="34" charset="-122"/>
-                <a:cs typeface="IBM Plex Sans" pitchFamily="34" charset="-120"/>
-              </a:rPr>
-              <a:t>6 · Advise</a:t>
-            </a:r>
-            <a:endParaRPr lang="en-US" sz="1800" dirty="0"/>
-          </a:p>
-        </p:txBody>
-      </p:sp>
-      <p:sp>
-        <p:nvSpPr>
-          <p:cNvPr id="32" name="Text 30"/>
-          <p:cNvSpPr/>
-          <p:nvPr/>
-        </p:nvSpPr>
-        <p:spPr>
-          <a:xfrm>
-            <a:off x="10601166" y="3834132"/>
-            <a:ext cx="543084" cy="271780"/>
-          </a:xfrm>
-          <a:custGeom>
-            <a:avLst/>
-            <a:gdLst/>
-            <a:ahLst/>
-            <a:cxnLst/>
-            <a:rect l="l" t="t" r="r" b="b"/>
-            <a:pathLst>
-              <a:path w="543084" h="271780">
-                <a:moveTo>
-                  <a:pt x="135890" y="0"/>
-                </a:moveTo>
-                <a:lnTo>
-                  <a:pt x="407194" y="0"/>
-                </a:lnTo>
-                <a:arcTo hR="135890" wR="135890" stAng="16200000" swAng="5400000"/>
-                <a:lnTo>
-                  <a:pt x="543084" y="135890"/>
-                </a:lnTo>
-                <a:arcTo hR="135890" wR="135890" stAng="0" swAng="5400000"/>
-                <a:lnTo>
-                  <a:pt x="135890" y="271780"/>
-                </a:lnTo>
-                <a:arcTo hR="135890" wR="135890" stAng="5400000" swAng="5400000"/>
-                <a:lnTo>
-                  <a:pt x="0" y="135890"/>
-                </a:lnTo>
-                <a:arcTo hR="135890" wR="135890" stAng="10800000" swAng="5400000"/>
-                <a:close/>
-              </a:path>
-            </a:pathLst>
-          </a:custGeom>
-          <a:noFill/>
-          <a:ln w="12700">
-            <a:solidFill>
-              <a:srgbClr val="14213D"/>
-            </a:solidFill>
-            <a:prstDash val="solid"/>
-          </a:ln>
-        </p:spPr>
-        <p:txBody>
-          <a:bodyPr wrap="none" lIns="0" tIns="0" rIns="0" bIns="0" rtlCol="0" anchor="ctr">
-            <a:normAutofit/>
-          </a:bodyPr>
-          <a:lstStyle/>
-          <a:p>
-            <a:pPr algn="ctr" indent="0" marL="0">
-              <a:lnSpc>
-                <a:spcPts val="1680"/>
-              </a:lnSpc>
-              <a:buNone/>
-            </a:pPr>
-            <a:r>
-              <a:rPr lang="en-US" sz="1200" b="1" dirty="0">
-                <a:solidFill>
-                  <a:srgbClr val="14213D"/>
-                </a:solidFill>
-                <a:latin typeface="IBM Plex Sans" pitchFamily="34" charset="0"/>
-                <a:ea typeface="IBM Plex Sans" pitchFamily="34" charset="-122"/>
-                <a:cs typeface="IBM Plex Sans" pitchFamily="34" charset="-120"/>
-              </a:rPr>
-              <a:t>Next</a:t>
-            </a:r>
-            <a:endParaRPr lang="en-US" sz="1200" dirty="0"/>
-          </a:p>
-        </p:txBody>
-      </p:sp>
-      <p:sp>
-        <p:nvSpPr>
-          <p:cNvPr id="33" name="Text 31"/>
-          <p:cNvSpPr/>
-          <p:nvPr/>
-        </p:nvSpPr>
-        <p:spPr>
-          <a:xfrm>
-            <a:off x="8221107" y="4201161"/>
-            <a:ext cx="3017378" cy="523240"/>
-          </a:xfrm>
-          <a:prstGeom prst="rect">
-            <a:avLst/>
-          </a:prstGeom>
-          <a:noFill/>
-          <a:ln/>
-        </p:spPr>
-        <p:txBody>
-          <a:bodyPr wrap="square" lIns="0" tIns="0" rIns="0" bIns="0" rtlCol="0" anchor="t">
-            <a:normAutofit/>
-          </a:bodyPr>
-          <a:lstStyle/>
-          <a:p>
-            <a:pPr algn="l" indent="0" marL="0">
-              <a:lnSpc>
-                <a:spcPts val="1960"/>
-              </a:lnSpc>
-              <a:buNone/>
-            </a:pPr>
-            <a:r>
-              <a:rPr lang="en-US" sz="1400" dirty="0">
-                <a:solidFill>
-                  <a:srgbClr val="4A5568"/>
-                </a:solidFill>
-                <a:latin typeface="IBM Plex Sans" pitchFamily="34" charset="0"/>
-                <a:ea typeface="IBM Plex Sans" pitchFamily="34" charset="-122"/>
-                <a:cs typeface="IBM Plex Sans" pitchFamily="34" charset="-120"/>
-              </a:rPr>
-              <a:t>Turn patterns into credit-risk and monitoring advice</a:t>
+              <a:t>Simple scikit-learn model, then credit-risk advice</a:t>
             </a:r>
             <a:endParaRPr lang="en-US" sz="1400" dirty="0"/>
           </a:p>
@@ -7309,7 +8364,7 @@
                 <a:ea typeface="IBM Plex Sans" pitchFamily="34" charset="-122"/>
                 <a:cs typeface="IBM Plex Sans" pitchFamily="34" charset="-120"/>
               </a:rPr>
-              <a:t>CLEANING SO FAR</a:t>
+              <a:t>CLEANING · 2023–2025 DATA</a:t>
             </a:r>
             <a:endParaRPr lang="en-US" sz="1200" dirty="0"/>
           </a:p>
@@ -7355,7 +8410,7 @@
                 <a:ea typeface="Source Serif 4" pitchFamily="18" charset="-122"/>
                 <a:cs typeface="Source Serif 4" pitchFamily="18" charset="-120"/>
               </a:rPr>
-              <a:t>Most gaps have a reason</a:t>
+              <a:t>Every gap now has a reason</a:t>
             </a:r>
             <a:endParaRPr lang="en-US" sz="3600" dirty="0"/>
           </a:p>
@@ -7377,19 +8432,19 @@
         </p:nvGraphicFramePr>
         <p:xfrm>
           <a:off x="822960" y="1971042"/>
-          <a:ext cx="10556240" cy="2141220"/>
+          <a:ext cx="10556240" cy="2311400"/>
         </p:xfrm>
         <a:graphic>
           <a:graphicData uri="http://schemas.openxmlformats.org/drawingml/2006/table">
             <a:tbl>
               <a:tblPr/>
               <a:tblGrid>
-                <a:gridCol w="3166872"/>
-                <a:gridCol w="1266749"/>
-                <a:gridCol w="3377997"/>
-                <a:gridCol w="2744622"/>
+                <a:gridCol w="3272434"/>
+                <a:gridCol w="1372311"/>
+                <a:gridCol w="3061310"/>
+                <a:gridCol w="2850185"/>
               </a:tblGrid>
-              <a:tr h="356870">
+              <a:tr h="330200">
                 <a:tc>
                   <a:txBody>
                     <a:bodyPr/>
@@ -7397,12 +8452,12 @@
                     <a:p>
                       <a:pPr indent="0" marL="0">
                         <a:lnSpc>
-                          <a:spcPts val="1820"/>
+                          <a:spcPts val="1680"/>
                         </a:lnSpc>
                         <a:buNone/>
                       </a:pPr>
                       <a:r>
-                        <a:rPr lang="en-US" sz="1300" b="1" dirty="0">
+                        <a:rPr lang="en-US" sz="1200" b="1" dirty="0">
                           <a:solidFill>
                             <a:srgbClr val="F6F4EE"/>
                           </a:solidFill>
@@ -7412,14 +8467,14 @@
                         </a:rPr>
                         <a:t>Column</a:t>
                       </a:r>
-                      <a:endParaRPr lang="en-US" sz="1300" dirty="0">
+                      <a:endParaRPr lang="en-US" sz="1200" dirty="0">
                         <a:latin typeface="IBM Plex Sans" charset="0"/>
                         <a:ea typeface="IBM Plex Sans" charset="0"/>
                         <a:cs typeface="IBM Plex Sans" charset="0"/>
                       </a:endParaRPr>
                     </a:p>
                   </a:txBody>
-                  <a:tcPr marL="57785" marR="57785" marT="57785" marB="57785" anchor="t">
+                  <a:tcPr marL="53340" marR="53340" marT="53340" marB="53340" anchor="t">
                     <a:lnL w="12700" cap="flat" cmpd="sng" algn="ctr">
                       <a:solidFill>
                         <a:srgbClr val="C4C3BE"/>
@@ -7468,12 +8523,12 @@
                     <a:p>
                       <a:pPr algn="r" indent="0" marL="0">
                         <a:lnSpc>
-                          <a:spcPts val="1820"/>
+                          <a:spcPts val="1680"/>
                         </a:lnSpc>
                         <a:buNone/>
                       </a:pPr>
                       <a:r>
-                        <a:rPr lang="en-US" sz="1300" b="1" dirty="0">
+                        <a:rPr lang="en-US" sz="1200" b="1" dirty="0">
                           <a:solidFill>
                             <a:srgbClr val="F6F4EE"/>
                           </a:solidFill>
@@ -7483,14 +8538,14 @@
                         </a:rPr>
                         <a:t>Missing</a:t>
                       </a:r>
-                      <a:endParaRPr lang="en-US" sz="1300" dirty="0">
+                      <a:endParaRPr lang="en-US" sz="1200" dirty="0">
                         <a:latin typeface="IBM Plex Sans" charset="0"/>
                         <a:ea typeface="IBM Plex Sans" charset="0"/>
                         <a:cs typeface="IBM Plex Sans" charset="0"/>
                       </a:endParaRPr>
                     </a:p>
                   </a:txBody>
-                  <a:tcPr marL="57785" marR="57785" marT="57785" marB="57785" anchor="t">
+                  <a:tcPr marL="53340" marR="53340" marT="53340" marB="53340" anchor="t">
                     <a:lnL w="12700" cap="flat" cmpd="sng" algn="ctr">
                       <a:solidFill>
                         <a:srgbClr val="141E34"/>
@@ -7539,12 +8594,12 @@
                     <a:p>
                       <a:pPr indent="0" marL="0">
                         <a:lnSpc>
-                          <a:spcPts val="1820"/>
+                          <a:spcPts val="1680"/>
                         </a:lnSpc>
                         <a:buNone/>
                       </a:pPr>
                       <a:r>
-                        <a:rPr lang="en-US" sz="1300" b="1" dirty="0">
+                        <a:rPr lang="en-US" sz="1200" b="1" dirty="0">
                           <a:solidFill>
                             <a:srgbClr val="F6F4EE"/>
                           </a:solidFill>
@@ -7554,14 +8609,14 @@
                         </a:rPr>
                         <a:t>Why</a:t>
                       </a:r>
-                      <a:endParaRPr lang="en-US" sz="1300" dirty="0">
+                      <a:endParaRPr lang="en-US" sz="1200" dirty="0">
                         <a:latin typeface="IBM Plex Sans" charset="0"/>
                         <a:ea typeface="IBM Plex Sans" charset="0"/>
                         <a:cs typeface="IBM Plex Sans" charset="0"/>
                       </a:endParaRPr>
                     </a:p>
                   </a:txBody>
-                  <a:tcPr marL="57785" marR="57785" marT="57785" marB="57785" anchor="t">
+                  <a:tcPr marL="53340" marR="53340" marT="53340" marB="53340" anchor="t">
                     <a:lnL w="12700" cap="flat" cmpd="sng" algn="ctr">
                       <a:solidFill>
                         <a:srgbClr val="141E34"/>
@@ -7610,12 +8665,12 @@
                     <a:p>
                       <a:pPr indent="0" marL="0">
                         <a:lnSpc>
-                          <a:spcPts val="1820"/>
+                          <a:spcPts val="1680"/>
                         </a:lnSpc>
                         <a:buNone/>
                       </a:pPr>
                       <a:r>
-                        <a:rPr lang="en-US" sz="1300" b="1" dirty="0">
+                        <a:rPr lang="en-US" sz="1200" b="1" dirty="0">
                           <a:solidFill>
                             <a:srgbClr val="F6F4EE"/>
                           </a:solidFill>
@@ -7623,16 +8678,16 @@
                           <a:ea typeface="IBM Plex Sans" pitchFamily="34" charset="-122"/>
                           <a:cs typeface="IBM Plex Sans" pitchFamily="34" charset="-120"/>
                         </a:rPr>
-                        <a:t>Plan</a:t>
+                        <a:t>What we did</a:t>
                       </a:r>
-                      <a:endParaRPr lang="en-US" sz="1300" dirty="0">
+                      <a:endParaRPr lang="en-US" sz="1200" dirty="0">
                         <a:latin typeface="IBM Plex Sans" charset="0"/>
                         <a:ea typeface="IBM Plex Sans" charset="0"/>
                         <a:cs typeface="IBM Plex Sans" charset="0"/>
                       </a:endParaRPr>
                     </a:p>
                   </a:txBody>
-                  <a:tcPr marL="57785" marR="57785" marT="57785" marB="57785" anchor="t">
+                  <a:tcPr marL="53340" marR="53340" marT="53340" marB="53340" anchor="t">
                     <a:lnL w="12700" cap="flat" cmpd="sng" algn="ctr">
                       <a:solidFill>
                         <a:srgbClr val="141E34"/>
@@ -7675,7 +8730,7 @@
                   </a:tcPr>
                 </a:tc>
               </a:tr>
-              <a:tr h="356870">
+              <a:tr h="330200">
                 <a:tc>
                   <a:txBody>
                     <a:bodyPr/>
@@ -7683,12 +8738,12 @@
                     <a:p>
                       <a:pPr indent="0" marL="0">
                         <a:lnSpc>
-                          <a:spcPts val="1820"/>
+                          <a:spcPts val="1680"/>
                         </a:lnSpc>
                         <a:buNone/>
                       </a:pPr>
                       <a:r>
-                        <a:rPr lang="en-US" sz="1300" dirty="0">
+                        <a:rPr lang="en-US" sz="1200" dirty="0">
                           <a:solidFill>
                             <a:srgbClr val="14213D"/>
                           </a:solidFill>
@@ -7698,14 +8753,14 @@
                         </a:rPr>
                         <a:t>months_in_default</a:t>
                       </a:r>
-                      <a:endParaRPr lang="en-US" sz="1300" dirty="0">
+                      <a:endParaRPr lang="en-US" sz="1200" dirty="0">
                         <a:latin typeface="IBM Plex Sans" charset="0"/>
                         <a:ea typeface="IBM Plex Sans" charset="0"/>
                         <a:cs typeface="IBM Plex Sans" charset="0"/>
                       </a:endParaRPr>
                     </a:p>
                   </a:txBody>
-                  <a:tcPr marL="57785" marR="57785" marT="57785" marB="57785" anchor="t">
+                  <a:tcPr marL="53340" marR="53340" marT="53340" marB="53340" anchor="t">
                     <a:lnL w="12700" cap="flat" cmpd="sng" algn="ctr">
                       <a:solidFill>
                         <a:srgbClr val="C4C3BE"/>
@@ -7754,12 +8809,12 @@
                     <a:p>
                       <a:pPr algn="r" indent="0" marL="0">
                         <a:lnSpc>
-                          <a:spcPts val="1820"/>
+                          <a:spcPts val="1680"/>
                         </a:lnSpc>
                         <a:buNone/>
                       </a:pPr>
                       <a:r>
-                        <a:rPr lang="en-US" sz="1300" dirty="0">
+                        <a:rPr lang="en-US" sz="1200" dirty="0">
                           <a:solidFill>
                             <a:srgbClr val="14213D"/>
                           </a:solidFill>
@@ -7767,16 +8822,16 @@
                           <a:ea typeface="IBM Plex Sans" pitchFamily="34" charset="-122"/>
                           <a:cs typeface="IBM Plex Sans" pitchFamily="34" charset="-120"/>
                         </a:rPr>
-                        <a:t>86.2%</a:t>
+                        <a:t>86.3%</a:t>
                       </a:r>
-                      <a:endParaRPr lang="en-US" sz="1300" dirty="0">
+                      <a:endParaRPr lang="en-US" sz="1200" dirty="0">
                         <a:latin typeface="IBM Plex Sans" charset="0"/>
                         <a:ea typeface="IBM Plex Sans" charset="0"/>
                         <a:cs typeface="IBM Plex Sans" charset="0"/>
                       </a:endParaRPr>
                     </a:p>
                   </a:txBody>
-                  <a:tcPr marL="57785" marR="57785" marT="57785" marB="57785" anchor="t">
+                  <a:tcPr marL="53340" marR="53340" marT="53340" marB="53340" anchor="t">
                     <a:lnL w="12700" cap="flat" cmpd="sng" algn="ctr">
                       <a:solidFill>
                         <a:srgbClr val="CBCAC6"/>
@@ -7825,12 +8880,12 @@
                     <a:p>
                       <a:pPr indent="0" marL="0">
                         <a:lnSpc>
-                          <a:spcPts val="1820"/>
+                          <a:spcPts val="1680"/>
                         </a:lnSpc>
                         <a:buNone/>
                       </a:pPr>
                       <a:r>
-                        <a:rPr lang="en-US" sz="1300" dirty="0">
+                        <a:rPr lang="en-US" sz="1200" dirty="0">
                           <a:solidFill>
                             <a:srgbClr val="4A5568"/>
                           </a:solidFill>
@@ -7840,14 +8895,14 @@
                         </a:rPr>
                         <a:t>Loan never defaulted</a:t>
                       </a:r>
-                      <a:endParaRPr lang="en-US" sz="1300" dirty="0">
+                      <a:endParaRPr lang="en-US" sz="1200" dirty="0">
                         <a:latin typeface="IBM Plex Sans" charset="0"/>
                         <a:ea typeface="IBM Plex Sans" charset="0"/>
                         <a:cs typeface="IBM Plex Sans" charset="0"/>
                       </a:endParaRPr>
                     </a:p>
                   </a:txBody>
-                  <a:tcPr marL="57785" marR="57785" marT="57785" marB="57785" anchor="t">
+                  <a:tcPr marL="53340" marR="53340" marT="53340" marB="53340" anchor="t">
                     <a:lnL w="12700" cap="flat" cmpd="sng" algn="ctr">
                       <a:solidFill>
                         <a:srgbClr val="CBCAC6"/>
@@ -7896,12 +8951,12 @@
                     <a:p>
                       <a:pPr indent="0" marL="0">
                         <a:lnSpc>
-                          <a:spcPts val="1820"/>
+                          <a:spcPts val="1680"/>
                         </a:lnSpc>
                         <a:buNone/>
                       </a:pPr>
                       <a:r>
-                        <a:rPr lang="en-US" sz="1300" dirty="0">
+                        <a:rPr lang="en-US" sz="1200" dirty="0">
                           <a:solidFill>
                             <a:srgbClr val="4A5568"/>
                           </a:solidFill>
@@ -7909,16 +8964,16 @@
                           <a:ea typeface="IBM Plex Sans" pitchFamily="34" charset="-122"/>
                           <a:cs typeface="IBM Plex Sans" pitchFamily="34" charset="-120"/>
                         </a:rPr>
-                        <a:t>Missing by design</a:t>
+                        <a:t>Added a 0/1 flag</a:t>
                       </a:r>
-                      <a:endParaRPr lang="en-US" sz="1300" dirty="0">
+                      <a:endParaRPr lang="en-US" sz="1200" dirty="0">
                         <a:latin typeface="IBM Plex Sans" charset="0"/>
                         <a:ea typeface="IBM Plex Sans" charset="0"/>
                         <a:cs typeface="IBM Plex Sans" charset="0"/>
                       </a:endParaRPr>
                     </a:p>
                   </a:txBody>
-                  <a:tcPr marL="57785" marR="57785" marT="57785" marB="57785" anchor="t">
+                  <a:tcPr marL="53340" marR="53340" marT="53340" marB="53340" anchor="t">
                     <a:lnL w="12700" cap="flat" cmpd="sng" algn="ctr">
                       <a:solidFill>
                         <a:srgbClr val="CBCAC6"/>
@@ -7961,7 +9016,7 @@
                   </a:tcPr>
                 </a:tc>
               </a:tr>
-              <a:tr h="356870">
+              <a:tr h="330200">
                 <a:tc>
                   <a:txBody>
                     <a:bodyPr/>
@@ -7969,12 +9024,12 @@
                     <a:p>
                       <a:pPr indent="0" marL="0">
                         <a:lnSpc>
-                          <a:spcPts val="1820"/>
+                          <a:spcPts val="1680"/>
                         </a:lnSpc>
                         <a:buNone/>
                       </a:pPr>
                       <a:r>
-                        <a:rPr lang="en-US" sz="1300" dirty="0">
+                        <a:rPr lang="en-US" sz="1200" dirty="0">
                           <a:solidFill>
                             <a:srgbClr val="14213D"/>
                           </a:solidFill>
@@ -7982,16 +9037,16 @@
                           <a:ea typeface="IBM Plex Sans" pitchFamily="34" charset="-122"/>
                           <a:cs typeface="IBM Plex Sans" pitchFamily="34" charset="-120"/>
                         </a:rPr>
-                        <a:t>customer_risk_rating</a:t>
+                        <a:t>early_repaid_at · next_payment_date</a:t>
                       </a:r>
-                      <a:endParaRPr lang="en-US" sz="1300" dirty="0">
+                      <a:endParaRPr lang="en-US" sz="1200" dirty="0">
                         <a:latin typeface="IBM Plex Sans" charset="0"/>
                         <a:ea typeface="IBM Plex Sans" charset="0"/>
                         <a:cs typeface="IBM Plex Sans" charset="0"/>
                       </a:endParaRPr>
                     </a:p>
                   </a:txBody>
-                  <a:tcPr marL="57785" marR="57785" marT="57785" marB="57785" anchor="t">
+                  <a:tcPr marL="53340" marR="53340" marT="53340" marB="53340" anchor="t">
                     <a:lnL w="12700" cap="flat" cmpd="sng" algn="ctr">
                       <a:solidFill>
                         <a:srgbClr val="C4C3BE"/>
@@ -8040,12 +9095,12 @@
                     <a:p>
                       <a:pPr algn="r" indent="0" marL="0">
                         <a:lnSpc>
-                          <a:spcPts val="1820"/>
+                          <a:spcPts val="1680"/>
                         </a:lnSpc>
                         <a:buNone/>
                       </a:pPr>
                       <a:r>
-                        <a:rPr lang="en-US" sz="1300" dirty="0">
+                        <a:rPr lang="en-US" sz="1200" dirty="0">
                           <a:solidFill>
                             <a:srgbClr val="14213D"/>
                           </a:solidFill>
@@ -8053,16 +9108,16 @@
                           <a:ea typeface="IBM Plex Sans" pitchFamily="34" charset="-122"/>
                           <a:cs typeface="IBM Plex Sans" pitchFamily="34" charset="-120"/>
                         </a:rPr>
-                        <a:t>40.1%</a:t>
+                        <a:t>67.9% · 54.4%</a:t>
                       </a:r>
-                      <a:endParaRPr lang="en-US" sz="1300" dirty="0">
+                      <a:endParaRPr lang="en-US" sz="1200" dirty="0">
                         <a:latin typeface="IBM Plex Sans" charset="0"/>
                         <a:ea typeface="IBM Plex Sans" charset="0"/>
                         <a:cs typeface="IBM Plex Sans" charset="0"/>
                       </a:endParaRPr>
                     </a:p>
                   </a:txBody>
-                  <a:tcPr marL="57785" marR="57785" marT="57785" marB="57785" anchor="t">
+                  <a:tcPr marL="53340" marR="53340" marT="53340" marB="53340" anchor="t">
                     <a:lnL w="12700" cap="flat" cmpd="sng" algn="ctr">
                       <a:solidFill>
                         <a:srgbClr val="C4C3BE"/>
@@ -8111,12 +9166,12 @@
                     <a:p>
                       <a:pPr indent="0" marL="0">
                         <a:lnSpc>
-                          <a:spcPts val="1820"/>
+                          <a:spcPts val="1680"/>
                         </a:lnSpc>
                         <a:buNone/>
                       </a:pPr>
                       <a:r>
-                        <a:rPr lang="en-US" sz="1300" dirty="0">
+                        <a:rPr lang="en-US" sz="1200" dirty="0">
                           <a:solidFill>
                             <a:srgbClr val="4A5568"/>
                           </a:solidFill>
@@ -8124,16 +9179,16 @@
                           <a:ea typeface="IBM Plex Sans" pitchFamily="34" charset="-122"/>
                           <a:cs typeface="IBM Plex Sans" pitchFamily="34" charset="-120"/>
                         </a:rPr>
-                        <a:t>Not given for older loans</a:t>
+                        <a:t>Not repaid early · no payment due</a:t>
                       </a:r>
-                      <a:endParaRPr lang="en-US" sz="1300" dirty="0">
+                      <a:endParaRPr lang="en-US" sz="1200" dirty="0">
                         <a:latin typeface="IBM Plex Sans" charset="0"/>
                         <a:ea typeface="IBM Plex Sans" charset="0"/>
                         <a:cs typeface="IBM Plex Sans" charset="0"/>
                       </a:endParaRPr>
                     </a:p>
                   </a:txBody>
-                  <a:tcPr marL="57785" marR="57785" marT="57785" marB="57785" anchor="t">
+                  <a:tcPr marL="53340" marR="53340" marT="53340" marB="53340" anchor="t">
                     <a:lnL w="12700" cap="flat" cmpd="sng" algn="ctr">
                       <a:solidFill>
                         <a:srgbClr val="C4C3BE"/>
@@ -8182,12 +9237,12 @@
                     <a:p>
                       <a:pPr indent="0" marL="0">
                         <a:lnSpc>
-                          <a:spcPts val="1820"/>
+                          <a:spcPts val="1680"/>
                         </a:lnSpc>
                         <a:buNone/>
                       </a:pPr>
                       <a:r>
-                        <a:rPr lang="en-US" sz="1300" dirty="0">
+                        <a:rPr lang="en-US" sz="1200" dirty="0">
                           <a:solidFill>
                             <a:srgbClr val="4A5568"/>
                           </a:solidFill>
@@ -8195,16 +9250,16 @@
                           <a:ea typeface="IBM Plex Sans" pitchFamily="34" charset="-122"/>
                           <a:cs typeface="IBM Plex Sans" pitchFamily="34" charset="-120"/>
                         </a:rPr>
-                        <a:t>Analyse rated loans only</a:t>
+                        <a:t>Kept: missing by design</a:t>
                       </a:r>
-                      <a:endParaRPr lang="en-US" sz="1300" dirty="0">
+                      <a:endParaRPr lang="en-US" sz="1200" dirty="0">
                         <a:latin typeface="IBM Plex Sans" charset="0"/>
                         <a:ea typeface="IBM Plex Sans" charset="0"/>
                         <a:cs typeface="IBM Plex Sans" charset="0"/>
                       </a:endParaRPr>
                     </a:p>
                   </a:txBody>
-                  <a:tcPr marL="57785" marR="57785" marT="57785" marB="57785" anchor="t">
+                  <a:tcPr marL="53340" marR="53340" marT="53340" marB="53340" anchor="t">
                     <a:lnL w="12700" cap="flat" cmpd="sng" algn="ctr">
                       <a:solidFill>
                         <a:srgbClr val="C4C3BE"/>
@@ -8247,7 +9302,7 @@
                   </a:tcPr>
                 </a:tc>
               </a:tr>
-              <a:tr h="356870">
+              <a:tr h="330200">
                 <a:tc>
                   <a:txBody>
                     <a:bodyPr/>
@@ -8255,12 +9310,12 @@
                     <a:p>
                       <a:pPr indent="0" marL="0">
                         <a:lnSpc>
-                          <a:spcPts val="1820"/>
+                          <a:spcPts val="1680"/>
                         </a:lnSpc>
                         <a:buNone/>
                       </a:pPr>
                       <a:r>
-                        <a:rPr lang="en-US" sz="1300" dirty="0">
+                        <a:rPr lang="en-US" sz="1200" dirty="0">
                           <a:solidFill>
                             <a:srgbClr val="14213D"/>
                           </a:solidFill>
@@ -8268,16 +9323,16 @@
                           <a:ea typeface="IBM Plex Sans" pitchFamily="34" charset="-122"/>
                           <a:cs typeface="IBM Plex Sans" pitchFamily="34" charset="-120"/>
                         </a:rPr>
-                        <a:t>combined_income</a:t>
+                        <a:t>customer_risk_rating</a:t>
                       </a:r>
-                      <a:endParaRPr lang="en-US" sz="1300" dirty="0">
+                      <a:endParaRPr lang="en-US" sz="1200" dirty="0">
                         <a:latin typeface="IBM Plex Sans" charset="0"/>
                         <a:ea typeface="IBM Plex Sans" charset="0"/>
                         <a:cs typeface="IBM Plex Sans" charset="0"/>
                       </a:endParaRPr>
                     </a:p>
                   </a:txBody>
-                  <a:tcPr marL="57785" marR="57785" marT="57785" marB="57785" anchor="t">
+                  <a:tcPr marL="53340" marR="53340" marT="53340" marB="53340" anchor="t">
                     <a:lnL w="12700" cap="flat" cmpd="sng" algn="ctr">
                       <a:solidFill>
                         <a:srgbClr val="C4C3BE"/>
@@ -8326,12 +9381,12 @@
                     <a:p>
                       <a:pPr algn="r" indent="0" marL="0">
                         <a:lnSpc>
-                          <a:spcPts val="1820"/>
+                          <a:spcPts val="1680"/>
                         </a:lnSpc>
                         <a:buNone/>
                       </a:pPr>
                       <a:r>
-                        <a:rPr lang="en-US" sz="1300" dirty="0">
+                        <a:rPr lang="en-US" sz="1200" dirty="0">
                           <a:solidFill>
                             <a:srgbClr val="14213D"/>
                           </a:solidFill>
@@ -8339,16 +9394,16 @@
                           <a:ea typeface="IBM Plex Sans" pitchFamily="34" charset="-122"/>
                           <a:cs typeface="IBM Plex Sans" pitchFamily="34" charset="-120"/>
                         </a:rPr>
-                        <a:t>32.4%</a:t>
+                        <a:t>13.7%</a:t>
                       </a:r>
-                      <a:endParaRPr lang="en-US" sz="1300" dirty="0">
+                      <a:endParaRPr lang="en-US" sz="1200" dirty="0">
                         <a:latin typeface="IBM Plex Sans" charset="0"/>
                         <a:ea typeface="IBM Plex Sans" charset="0"/>
                         <a:cs typeface="IBM Plex Sans" charset="0"/>
                       </a:endParaRPr>
                     </a:p>
                   </a:txBody>
-                  <a:tcPr marL="57785" marR="57785" marT="57785" marB="57785" anchor="t">
+                  <a:tcPr marL="53340" marR="53340" marT="53340" marB="53340" anchor="t">
                     <a:lnL w="12700" cap="flat" cmpd="sng" algn="ctr">
                       <a:solidFill>
                         <a:srgbClr val="CBCAC6"/>
@@ -8397,12 +9452,12 @@
                     <a:p>
                       <a:pPr indent="0" marL="0">
                         <a:lnSpc>
-                          <a:spcPts val="1820"/>
+                          <a:spcPts val="1680"/>
                         </a:lnSpc>
                         <a:buNone/>
                       </a:pPr>
                       <a:r>
-                        <a:rPr lang="en-US" sz="1300" dirty="0">
+                        <a:rPr lang="en-US" sz="1200" dirty="0">
                           <a:solidFill>
                             <a:srgbClr val="4A5568"/>
                           </a:solidFill>
@@ -8410,16 +9465,16 @@
                           <a:ea typeface="IBM Plex Sans" pitchFamily="34" charset="-122"/>
                           <a:cs typeface="IBM Plex Sans" pitchFamily="34" charset="-120"/>
                         </a:rPr>
-                        <a:t>Not recorded for many older loans</a:t>
+                        <a:t>Loans issued without a rating</a:t>
                       </a:r>
-                      <a:endParaRPr lang="en-US" sz="1300" dirty="0">
+                      <a:endParaRPr lang="en-US" sz="1200" dirty="0">
                         <a:latin typeface="IBM Plex Sans" charset="0"/>
                         <a:ea typeface="IBM Plex Sans" charset="0"/>
                         <a:cs typeface="IBM Plex Sans" charset="0"/>
                       </a:endParaRPr>
                     </a:p>
                   </a:txBody>
-                  <a:tcPr marL="57785" marR="57785" marT="57785" marB="57785" anchor="t">
+                  <a:tcPr marL="53340" marR="53340" marT="53340" marB="53340" anchor="t">
                     <a:lnL w="12700" cap="flat" cmpd="sng" algn="ctr">
                       <a:solidFill>
                         <a:srgbClr val="CBCAC6"/>
@@ -8468,12 +9523,12 @@
                     <a:p>
                       <a:pPr indent="0" marL="0">
                         <a:lnSpc>
-                          <a:spcPts val="1820"/>
+                          <a:spcPts val="1680"/>
                         </a:lnSpc>
                         <a:buNone/>
                       </a:pPr>
                       <a:r>
-                        <a:rPr lang="en-US" sz="1300" dirty="0">
+                        <a:rPr lang="en-US" sz="1200" dirty="0">
                           <a:solidFill>
                             <a:srgbClr val="4A5568"/>
                           </a:solidFill>
@@ -8481,16 +9536,16 @@
                           <a:ea typeface="IBM Plex Sans" pitchFamily="34" charset="-122"/>
                           <a:cs typeface="IBM Plex Sans" pitchFamily="34" charset="-120"/>
                         </a:rPr>
-                        <a:t>Keep; never fill with 0</a:t>
+                        <a:t>Own group: “Unrated”</a:t>
                       </a:r>
-                      <a:endParaRPr lang="en-US" sz="1300" dirty="0">
+                      <a:endParaRPr lang="en-US" sz="1200" dirty="0">
                         <a:latin typeface="IBM Plex Sans" charset="0"/>
                         <a:ea typeface="IBM Plex Sans" charset="0"/>
                         <a:cs typeface="IBM Plex Sans" charset="0"/>
                       </a:endParaRPr>
                     </a:p>
                   </a:txBody>
-                  <a:tcPr marL="57785" marR="57785" marT="57785" marB="57785" anchor="t">
+                  <a:tcPr marL="53340" marR="53340" marT="53340" marB="53340" anchor="t">
                     <a:lnL w="12700" cap="flat" cmpd="sng" algn="ctr">
                       <a:solidFill>
                         <a:srgbClr val="CBCAC6"/>
@@ -8533,7 +9588,7 @@
                   </a:tcPr>
                 </a:tc>
               </a:tr>
-              <a:tr h="356870">
+              <a:tr h="330200">
                 <a:tc>
                   <a:txBody>
                     <a:bodyPr/>
@@ -8541,12 +9596,12 @@
                     <a:p>
                       <a:pPr indent="0" marL="0">
                         <a:lnSpc>
-                          <a:spcPts val="1820"/>
+                          <a:spcPts val="1680"/>
                         </a:lnSpc>
                         <a:buNone/>
                       </a:pPr>
                       <a:r>
-                        <a:rPr lang="en-US" sz="1300" dirty="0">
+                        <a:rPr lang="en-US" sz="1200" dirty="0">
                           <a:solidFill>
                             <a:srgbClr val="14213D"/>
                           </a:solidFill>
@@ -8556,14 +9611,14 @@
                         </a:rPr>
                         <a:t>has_default_within_12_months</a:t>
                       </a:r>
-                      <a:endParaRPr lang="en-US" sz="1300" dirty="0">
+                      <a:endParaRPr lang="en-US" sz="1200" dirty="0">
                         <a:latin typeface="IBM Plex Sans" charset="0"/>
                         <a:ea typeface="IBM Plex Sans" charset="0"/>
                         <a:cs typeface="IBM Plex Sans" charset="0"/>
                       </a:endParaRPr>
                     </a:p>
                   </a:txBody>
-                  <a:tcPr marL="57785" marR="57785" marT="57785" marB="57785" anchor="t">
+                  <a:tcPr marL="53340" marR="53340" marT="53340" marB="53340" anchor="t">
                     <a:lnL w="12700" cap="flat" cmpd="sng" algn="ctr">
                       <a:solidFill>
                         <a:srgbClr val="C4C3BE"/>
@@ -8612,12 +9667,12 @@
                     <a:p>
                       <a:pPr algn="r" indent="0" marL="0">
                         <a:lnSpc>
-                          <a:spcPts val="1820"/>
+                          <a:spcPts val="1680"/>
                         </a:lnSpc>
                         <a:buNone/>
                       </a:pPr>
                       <a:r>
-                        <a:rPr lang="en-US" sz="1300" dirty="0">
+                        <a:rPr lang="en-US" sz="1200" dirty="0">
                           <a:solidFill>
                             <a:srgbClr val="14213D"/>
                           </a:solidFill>
@@ -8625,16 +9680,16 @@
                           <a:ea typeface="IBM Plex Sans" pitchFamily="34" charset="-122"/>
                           <a:cs typeface="IBM Plex Sans" pitchFamily="34" charset="-120"/>
                         </a:rPr>
-                        <a:t>22.3%</a:t>
+                        <a:t>6.2%</a:t>
                       </a:r>
-                      <a:endParaRPr lang="en-US" sz="1300" dirty="0">
+                      <a:endParaRPr lang="en-US" sz="1200" dirty="0">
                         <a:latin typeface="IBM Plex Sans" charset="0"/>
                         <a:ea typeface="IBM Plex Sans" charset="0"/>
                         <a:cs typeface="IBM Plex Sans" charset="0"/>
                       </a:endParaRPr>
                     </a:p>
                   </a:txBody>
-                  <a:tcPr marL="57785" marR="57785" marT="57785" marB="57785" anchor="t">
+                  <a:tcPr marL="53340" marR="53340" marT="53340" marB="53340" anchor="t">
                     <a:lnL w="12700" cap="flat" cmpd="sng" algn="ctr">
                       <a:solidFill>
                         <a:srgbClr val="C4C3BE"/>
@@ -8683,12 +9738,12 @@
                     <a:p>
                       <a:pPr indent="0" marL="0">
                         <a:lnSpc>
-                          <a:spcPts val="1820"/>
+                          <a:spcPts val="1680"/>
                         </a:lnSpc>
                         <a:buNone/>
                       </a:pPr>
                       <a:r>
-                        <a:rPr lang="en-US" sz="1300" dirty="0">
+                        <a:rPr lang="en-US" sz="1200" dirty="0">
                           <a:solidFill>
                             <a:srgbClr val="4A5568"/>
                           </a:solidFill>
@@ -8696,16 +9751,16 @@
                           <a:ea typeface="IBM Plex Sans" pitchFamily="34" charset="-122"/>
                           <a:cs typeface="IBM Plex Sans" pitchFamily="34" charset="-120"/>
                         </a:rPr>
-                        <a:t>Loan under 12 months old</a:t>
+                        <a:t>Active loans under 12 months old</a:t>
                       </a:r>
-                      <a:endParaRPr lang="en-US" sz="1300" dirty="0">
+                      <a:endParaRPr lang="en-US" sz="1200" dirty="0">
                         <a:latin typeface="IBM Plex Sans" charset="0"/>
                         <a:ea typeface="IBM Plex Sans" charset="0"/>
                         <a:cs typeface="IBM Plex Sans" charset="0"/>
                       </a:endParaRPr>
                     </a:p>
                   </a:txBody>
-                  <a:tcPr marL="57785" marR="57785" marT="57785" marB="57785" anchor="t">
+                  <a:tcPr marL="53340" marR="53340" marT="53340" marB="53340" anchor="t">
                     <a:lnL w="12700" cap="flat" cmpd="sng" algn="ctr">
                       <a:solidFill>
                         <a:srgbClr val="C4C3BE"/>
@@ -8754,12 +9809,12 @@
                     <a:p>
                       <a:pPr indent="0" marL="0">
                         <a:lnSpc>
-                          <a:spcPts val="1820"/>
+                          <a:spcPts val="1680"/>
                         </a:lnSpc>
                         <a:buNone/>
                       </a:pPr>
                       <a:r>
-                        <a:rPr lang="en-US" sz="1300" dirty="0">
+                        <a:rPr lang="en-US" sz="1200" dirty="0">
                           <a:solidFill>
                             <a:srgbClr val="4A5568"/>
                           </a:solidFill>
@@ -8767,16 +9822,16 @@
                           <a:ea typeface="IBM Plex Sans" pitchFamily="34" charset="-122"/>
                           <a:cs typeface="IBM Plex Sans" pitchFamily="34" charset="-120"/>
                         </a:rPr>
-                        <a:t>Use mature loans only</a:t>
+                        <a:t>Filled known outcomes; rest left out</a:t>
                       </a:r>
-                      <a:endParaRPr lang="en-US" sz="1300" dirty="0">
+                      <a:endParaRPr lang="en-US" sz="1200" dirty="0">
                         <a:latin typeface="IBM Plex Sans" charset="0"/>
                         <a:ea typeface="IBM Plex Sans" charset="0"/>
                         <a:cs typeface="IBM Plex Sans" charset="0"/>
                       </a:endParaRPr>
                     </a:p>
                   </a:txBody>
-                  <a:tcPr marL="57785" marR="57785" marT="57785" marB="57785" anchor="t">
+                  <a:tcPr marL="53340" marR="53340" marT="53340" marB="53340" anchor="t">
                     <a:lnL w="12700" cap="flat" cmpd="sng" algn="ctr">
                       <a:solidFill>
                         <a:srgbClr val="C4C3BE"/>
@@ -8819,7 +9874,7 @@
                   </a:tcPr>
                 </a:tc>
               </a:tr>
-              <a:tr h="356870">
+              <a:tr h="330200">
                 <a:tc>
                   <a:txBody>
                     <a:bodyPr/>
@@ -8827,12 +9882,12 @@
                     <a:p>
                       <a:pPr indent="0" marL="0">
                         <a:lnSpc>
-                          <a:spcPts val="1820"/>
+                          <a:spcPts val="1680"/>
                         </a:lnSpc>
                         <a:buNone/>
                       </a:pPr>
                       <a:r>
-                        <a:rPr lang="en-US" sz="1300" dirty="0">
+                        <a:rPr lang="en-US" sz="1200" dirty="0">
                           <a:solidFill>
                             <a:srgbClr val="14213D"/>
                           </a:solidFill>
@@ -8840,16 +9895,16 @@
                           <a:ea typeface="IBM Plex Sans" pitchFamily="34" charset="-122"/>
                           <a:cs typeface="IBM Plex Sans" pitchFamily="34" charset="-120"/>
                         </a:rPr>
-                        <a:t>is_default + repayment columns</a:t>
+                        <a:t>months_on_book</a:t>
                       </a:r>
-                      <a:endParaRPr lang="en-US" sz="1300" dirty="0">
+                      <a:endParaRPr lang="en-US" sz="1200" dirty="0">
                         <a:latin typeface="IBM Plex Sans" charset="0"/>
                         <a:ea typeface="IBM Plex Sans" charset="0"/>
                         <a:cs typeface="IBM Plex Sans" charset="0"/>
                       </a:endParaRPr>
                     </a:p>
                   </a:txBody>
-                  <a:tcPr marL="57785" marR="57785" marT="57785" marB="57785" anchor="t">
+                  <a:tcPr marL="53340" marR="53340" marT="53340" marB="53340" anchor="t">
                     <a:lnL w="12700" cap="flat" cmpd="sng" algn="ctr">
                       <a:solidFill>
                         <a:srgbClr val="C4C3BE"/>
@@ -8898,12 +9953,12 @@
                     <a:p>
                       <a:pPr algn="r" indent="0" marL="0">
                         <a:lnSpc>
-                          <a:spcPts val="1820"/>
+                          <a:spcPts val="1680"/>
                         </a:lnSpc>
                         <a:buNone/>
                       </a:pPr>
                       <a:r>
-                        <a:rPr lang="en-US" sz="1300" dirty="0">
+                        <a:rPr lang="en-US" sz="1200" dirty="0">
                           <a:solidFill>
                             <a:srgbClr val="14213D"/>
                           </a:solidFill>
@@ -8911,16 +9966,16 @@
                           <a:ea typeface="IBM Plex Sans" pitchFamily="34" charset="-122"/>
                           <a:cs typeface="IBM Plex Sans" pitchFamily="34" charset="-120"/>
                         </a:rPr>
-                        <a:t>0.9%</a:t>
+                        <a:t>0.6%</a:t>
                       </a:r>
-                      <a:endParaRPr lang="en-US" sz="1300" dirty="0">
+                      <a:endParaRPr lang="en-US" sz="1200" dirty="0">
                         <a:latin typeface="IBM Plex Sans" charset="0"/>
                         <a:ea typeface="IBM Plex Sans" charset="0"/>
                         <a:cs typeface="IBM Plex Sans" charset="0"/>
                       </a:endParaRPr>
                     </a:p>
                   </a:txBody>
-                  <a:tcPr marL="57785" marR="57785" marT="57785" marB="57785" anchor="t">
+                  <a:tcPr marL="53340" marR="53340" marT="53340" marB="53340" anchor="t">
                     <a:lnL w="12700" cap="flat" cmpd="sng" algn="ctr">
                       <a:solidFill>
                         <a:srgbClr val="CBCAC6"/>
@@ -8969,12 +10024,12 @@
                     <a:p>
                       <a:pPr indent="0" marL="0">
                         <a:lnSpc>
-                          <a:spcPts val="1820"/>
+                          <a:spcPts val="1680"/>
                         </a:lnSpc>
                         <a:buNone/>
                       </a:pPr>
                       <a:r>
-                        <a:rPr lang="en-US" sz="1300" dirty="0">
+                        <a:rPr lang="en-US" sz="1200" dirty="0">
                           <a:solidFill>
                             <a:srgbClr val="4A5568"/>
                           </a:solidFill>
@@ -8982,16 +10037,16 @@
                           <a:ea typeface="IBM Plex Sans" pitchFamily="34" charset="-122"/>
                           <a:cs typeface="IBM Plex Sans" pitchFamily="34" charset="-120"/>
                         </a:rPr>
-                        <a:t>7,713 cancelled or returned loans</a:t>
+                        <a:t>Cancelled loans that never ran</a:t>
                       </a:r>
-                      <a:endParaRPr lang="en-US" sz="1300" dirty="0">
+                      <a:endParaRPr lang="en-US" sz="1200" dirty="0">
                         <a:latin typeface="IBM Plex Sans" charset="0"/>
                         <a:ea typeface="IBM Plex Sans" charset="0"/>
                         <a:cs typeface="IBM Plex Sans" charset="0"/>
                       </a:endParaRPr>
                     </a:p>
                   </a:txBody>
-                  <a:tcPr marL="57785" marR="57785" marT="57785" marB="57785" anchor="t">
+                  <a:tcPr marL="53340" marR="53340" marT="53340" marB="53340" anchor="t">
                     <a:lnL w="12700" cap="flat" cmpd="sng" algn="ctr">
                       <a:solidFill>
                         <a:srgbClr val="CBCAC6"/>
@@ -9040,12 +10095,12 @@
                     <a:p>
                       <a:pPr indent="0" marL="0">
                         <a:lnSpc>
-                          <a:spcPts val="1820"/>
+                          <a:spcPts val="1680"/>
                         </a:lnSpc>
                         <a:buNone/>
                       </a:pPr>
                       <a:r>
-                        <a:rPr lang="en-US" sz="1300" dirty="0">
+                        <a:rPr lang="en-US" sz="1200" dirty="0">
                           <a:solidFill>
                             <a:srgbClr val="4A5568"/>
                           </a:solidFill>
@@ -9053,16 +10108,16 @@
                           <a:ea typeface="IBM Plex Sans" pitchFamily="34" charset="-122"/>
                           <a:cs typeface="IBM Plex Sans" pitchFamily="34" charset="-120"/>
                         </a:rPr>
-                        <a:t>Open: remove?</a:t>
+                        <a:t>Kept; cancelled loans flagged</a:t>
                       </a:r>
-                      <a:endParaRPr lang="en-US" sz="1300" dirty="0">
+                      <a:endParaRPr lang="en-US" sz="1200" dirty="0">
                         <a:latin typeface="IBM Plex Sans" charset="0"/>
                         <a:ea typeface="IBM Plex Sans" charset="0"/>
                         <a:cs typeface="IBM Plex Sans" charset="0"/>
                       </a:endParaRPr>
                     </a:p>
                   </a:txBody>
-                  <a:tcPr marL="57785" marR="57785" marT="57785" marB="57785" anchor="t">
+                  <a:tcPr marL="53340" marR="53340" marT="53340" marB="53340" anchor="t">
                     <a:lnL w="12700" cap="flat" cmpd="sng" algn="ctr">
                       <a:solidFill>
                         <a:srgbClr val="CBCAC6"/>
@@ -9101,6 +10156,292 @@
                     </a:lnB>
                     <a:solidFill>
                       <a:srgbClr val="FFFDF8"/>
+                    </a:solidFill>
+                  </a:tcPr>
+                </a:tc>
+              </a:tr>
+              <a:tr h="330200">
+                <a:tc>
+                  <a:txBody>
+                    <a:bodyPr/>
+                    <a:lstStyle/>
+                    <a:p>
+                      <a:pPr indent="0" marL="0">
+                        <a:lnSpc>
+                          <a:spcPts val="1680"/>
+                        </a:lnSpc>
+                        <a:buNone/>
+                      </a:pPr>
+                      <a:r>
+                        <a:rPr lang="en-US" sz="1200" dirty="0">
+                          <a:solidFill>
+                            <a:srgbClr val="14213D"/>
+                          </a:solidFill>
+                          <a:latin typeface="IBM Plex Sans" pitchFamily="34" charset="0"/>
+                          <a:ea typeface="IBM Plex Sans" pitchFamily="34" charset="-122"/>
+                          <a:cs typeface="IBM Plex Sans" pitchFamily="34" charset="-120"/>
+                        </a:rPr>
+                        <a:t>combined_income</a:t>
+                      </a:r>
+                      <a:endParaRPr lang="en-US" sz="1200" dirty="0">
+                        <a:latin typeface="IBM Plex Sans" charset="0"/>
+                        <a:ea typeface="IBM Plex Sans" charset="0"/>
+                        <a:cs typeface="IBM Plex Sans" charset="0"/>
+                      </a:endParaRPr>
+                    </a:p>
+                  </a:txBody>
+                  <a:tcPr marL="53340" marR="53340" marT="53340" marB="53340" anchor="t">
+                    <a:lnL w="12700" cap="flat" cmpd="sng" algn="ctr">
+                      <a:solidFill>
+                        <a:srgbClr val="C4C3BE"/>
+                      </a:solidFill>
+                      <a:prstDash val="solid"/>
+                      <a:round/>
+                      <a:headEnd type="none" w="med" len="med"/>
+                      <a:tailEnd type="none" w="med" len="med"/>
+                    </a:lnL>
+                    <a:lnR w="12700" cap="flat" cmpd="sng" algn="ctr">
+                      <a:solidFill>
+                        <a:srgbClr val="C4C3BE"/>
+                      </a:solidFill>
+                      <a:prstDash val="solid"/>
+                      <a:round/>
+                      <a:headEnd type="none" w="med" len="med"/>
+                      <a:tailEnd type="none" w="med" len="med"/>
+                    </a:lnR>
+                    <a:lnT w="12700" cap="flat" cmpd="sng" algn="ctr">
+                      <a:solidFill>
+                        <a:srgbClr val="CBCAC6"/>
+                      </a:solidFill>
+                      <a:prstDash val="solid"/>
+                      <a:round/>
+                      <a:headEnd type="none" w="med" len="med"/>
+                      <a:tailEnd type="none" w="med" len="med"/>
+                    </a:lnT>
+                    <a:lnB w="12700" cap="flat" cmpd="sng" algn="ctr">
+                      <a:solidFill>
+                        <a:srgbClr val="C4C3BE"/>
+                      </a:solidFill>
+                      <a:prstDash val="solid"/>
+                      <a:round/>
+                      <a:headEnd type="none" w="med" len="med"/>
+                      <a:tailEnd type="none" w="med" len="med"/>
+                    </a:lnB>
+                    <a:solidFill>
+                      <a:srgbClr val="F6F4EE"/>
+                    </a:solidFill>
+                  </a:tcPr>
+                </a:tc>
+                <a:tc>
+                  <a:txBody>
+                    <a:bodyPr/>
+                    <a:lstStyle/>
+                    <a:p>
+                      <a:pPr algn="r" indent="0" marL="0">
+                        <a:lnSpc>
+                          <a:spcPts val="1680"/>
+                        </a:lnSpc>
+                        <a:buNone/>
+                      </a:pPr>
+                      <a:r>
+                        <a:rPr lang="en-US" sz="1200" dirty="0">
+                          <a:solidFill>
+                            <a:srgbClr val="14213D"/>
+                          </a:solidFill>
+                          <a:latin typeface="IBM Plex Sans" pitchFamily="34" charset="0"/>
+                          <a:ea typeface="IBM Plex Sans" pitchFamily="34" charset="-122"/>
+                          <a:cs typeface="IBM Plex Sans" pitchFamily="34" charset="-120"/>
+                        </a:rPr>
+                        <a:t>2 loans</a:t>
+                      </a:r>
+                      <a:endParaRPr lang="en-US" sz="1200" dirty="0">
+                        <a:latin typeface="IBM Plex Sans" charset="0"/>
+                        <a:ea typeface="IBM Plex Sans" charset="0"/>
+                        <a:cs typeface="IBM Plex Sans" charset="0"/>
+                      </a:endParaRPr>
+                    </a:p>
+                  </a:txBody>
+                  <a:tcPr marL="53340" marR="53340" marT="53340" marB="53340" anchor="t">
+                    <a:lnL w="12700" cap="flat" cmpd="sng" algn="ctr">
+                      <a:solidFill>
+                        <a:srgbClr val="C4C3BE"/>
+                      </a:solidFill>
+                      <a:prstDash val="solid"/>
+                      <a:round/>
+                      <a:headEnd type="none" w="med" len="med"/>
+                      <a:tailEnd type="none" w="med" len="med"/>
+                    </a:lnL>
+                    <a:lnR w="12700" cap="flat" cmpd="sng" algn="ctr">
+                      <a:solidFill>
+                        <a:srgbClr val="C4C3BE"/>
+                      </a:solidFill>
+                      <a:prstDash val="solid"/>
+                      <a:round/>
+                      <a:headEnd type="none" w="med" len="med"/>
+                      <a:tailEnd type="none" w="med" len="med"/>
+                    </a:lnR>
+                    <a:lnT w="12700" cap="flat" cmpd="sng" algn="ctr">
+                      <a:solidFill>
+                        <a:srgbClr val="CBCAC6"/>
+                      </a:solidFill>
+                      <a:prstDash val="solid"/>
+                      <a:round/>
+                      <a:headEnd type="none" w="med" len="med"/>
+                      <a:tailEnd type="none" w="med" len="med"/>
+                    </a:lnT>
+                    <a:lnB w="12700" cap="flat" cmpd="sng" algn="ctr">
+                      <a:solidFill>
+                        <a:srgbClr val="C4C3BE"/>
+                      </a:solidFill>
+                      <a:prstDash val="solid"/>
+                      <a:round/>
+                      <a:headEnd type="none" w="med" len="med"/>
+                      <a:tailEnd type="none" w="med" len="med"/>
+                    </a:lnB>
+                    <a:solidFill>
+                      <a:srgbClr val="F6F4EE"/>
+                    </a:solidFill>
+                  </a:tcPr>
+                </a:tc>
+                <a:tc>
+                  <a:txBody>
+                    <a:bodyPr/>
+                    <a:lstStyle/>
+                    <a:p>
+                      <a:pPr indent="0" marL="0">
+                        <a:lnSpc>
+                          <a:spcPts val="1680"/>
+                        </a:lnSpc>
+                        <a:buNone/>
+                      </a:pPr>
+                      <a:r>
+                        <a:rPr lang="en-US" sz="1200" dirty="0">
+                          <a:solidFill>
+                            <a:srgbClr val="4A5568"/>
+                          </a:solidFill>
+                          <a:latin typeface="IBM Plex Sans" pitchFamily="34" charset="0"/>
+                          <a:ea typeface="IBM Plex Sans" pitchFamily="34" charset="-122"/>
+                          <a:cs typeface="IBM Plex Sans" pitchFamily="34" charset="-120"/>
+                        </a:rPr>
+                        <a:t>Isolated gaps</a:t>
+                      </a:r>
+                      <a:endParaRPr lang="en-US" sz="1200" dirty="0">
+                        <a:latin typeface="IBM Plex Sans" charset="0"/>
+                        <a:ea typeface="IBM Plex Sans" charset="0"/>
+                        <a:cs typeface="IBM Plex Sans" charset="0"/>
+                      </a:endParaRPr>
+                    </a:p>
+                  </a:txBody>
+                  <a:tcPr marL="53340" marR="53340" marT="53340" marB="53340" anchor="t">
+                    <a:lnL w="12700" cap="flat" cmpd="sng" algn="ctr">
+                      <a:solidFill>
+                        <a:srgbClr val="C4C3BE"/>
+                      </a:solidFill>
+                      <a:prstDash val="solid"/>
+                      <a:round/>
+                      <a:headEnd type="none" w="med" len="med"/>
+                      <a:tailEnd type="none" w="med" len="med"/>
+                    </a:lnL>
+                    <a:lnR w="12700" cap="flat" cmpd="sng" algn="ctr">
+                      <a:solidFill>
+                        <a:srgbClr val="C4C3BE"/>
+                      </a:solidFill>
+                      <a:prstDash val="solid"/>
+                      <a:round/>
+                      <a:headEnd type="none" w="med" len="med"/>
+                      <a:tailEnd type="none" w="med" len="med"/>
+                    </a:lnR>
+                    <a:lnT w="12700" cap="flat" cmpd="sng" algn="ctr">
+                      <a:solidFill>
+                        <a:srgbClr val="CBCAC6"/>
+                      </a:solidFill>
+                      <a:prstDash val="solid"/>
+                      <a:round/>
+                      <a:headEnd type="none" w="med" len="med"/>
+                      <a:tailEnd type="none" w="med" len="med"/>
+                    </a:lnT>
+                    <a:lnB w="12700" cap="flat" cmpd="sng" algn="ctr">
+                      <a:solidFill>
+                        <a:srgbClr val="C4C3BE"/>
+                      </a:solidFill>
+                      <a:prstDash val="solid"/>
+                      <a:round/>
+                      <a:headEnd type="none" w="med" len="med"/>
+                      <a:tailEnd type="none" w="med" len="med"/>
+                    </a:lnB>
+                    <a:solidFill>
+                      <a:srgbClr val="F6F4EE"/>
+                    </a:solidFill>
+                  </a:tcPr>
+                </a:tc>
+                <a:tc>
+                  <a:txBody>
+                    <a:bodyPr/>
+                    <a:lstStyle/>
+                    <a:p>
+                      <a:pPr indent="0" marL="0">
+                        <a:lnSpc>
+                          <a:spcPts val="1680"/>
+                        </a:lnSpc>
+                        <a:buNone/>
+                      </a:pPr>
+                      <a:r>
+                        <a:rPr lang="en-US" sz="1200" dirty="0">
+                          <a:solidFill>
+                            <a:srgbClr val="4A5568"/>
+                          </a:solidFill>
+                          <a:latin typeface="IBM Plex Sans" pitchFamily="34" charset="0"/>
+                          <a:ea typeface="IBM Plex Sans" pitchFamily="34" charset="-122"/>
+                          <a:cs typeface="IBM Plex Sans" pitchFamily="34" charset="-120"/>
+                        </a:rPr>
+                        <a:t>Removed the 2 rows</a:t>
+                      </a:r>
+                      <a:endParaRPr lang="en-US" sz="1200" dirty="0">
+                        <a:latin typeface="IBM Plex Sans" charset="0"/>
+                        <a:ea typeface="IBM Plex Sans" charset="0"/>
+                        <a:cs typeface="IBM Plex Sans" charset="0"/>
+                      </a:endParaRPr>
+                    </a:p>
+                  </a:txBody>
+                  <a:tcPr marL="53340" marR="53340" marT="53340" marB="53340" anchor="t">
+                    <a:lnL w="12700" cap="flat" cmpd="sng" algn="ctr">
+                      <a:solidFill>
+                        <a:srgbClr val="C4C3BE"/>
+                      </a:solidFill>
+                      <a:prstDash val="solid"/>
+                      <a:round/>
+                      <a:headEnd type="none" w="med" len="med"/>
+                      <a:tailEnd type="none" w="med" len="med"/>
+                    </a:lnL>
+                    <a:lnR w="12700" cap="flat" cmpd="sng" algn="ctr">
+                      <a:solidFill>
+                        <a:srgbClr val="C4C3BE"/>
+                      </a:solidFill>
+                      <a:prstDash val="solid"/>
+                      <a:round/>
+                      <a:headEnd type="none" w="med" len="med"/>
+                      <a:tailEnd type="none" w="med" len="med"/>
+                    </a:lnR>
+                    <a:lnT w="12700" cap="flat" cmpd="sng" algn="ctr">
+                      <a:solidFill>
+                        <a:srgbClr val="CBCAC6"/>
+                      </a:solidFill>
+                      <a:prstDash val="solid"/>
+                      <a:round/>
+                      <a:headEnd type="none" w="med" len="med"/>
+                      <a:tailEnd type="none" w="med" len="med"/>
+                    </a:lnT>
+                    <a:lnB w="12700" cap="flat" cmpd="sng" algn="ctr">
+                      <a:solidFill>
+                        <a:srgbClr val="C4C3BE"/>
+                      </a:solidFill>
+                      <a:prstDash val="solid"/>
+                      <a:round/>
+                      <a:headEnd type="none" w="med" len="med"/>
+                      <a:tailEnd type="none" w="med" len="med"/>
+                    </a:lnB>
+                    <a:solidFill>
+                      <a:srgbClr val="F6F4EE"/>
                     </a:solidFill>
                   </a:tcPr>
                 </a:tc>
@@ -10009,11 +11350,11 @@
         <p:spPr>
           <a:xfrm>
             <a:off x="812800" y="1960879"/>
-            <a:ext cx="3386614" cy="2458720"/>
+            <a:ext cx="3386614" cy="2583180"/>
           </a:xfrm>
           <a:prstGeom prst="roundRect">
             <a:avLst>
-              <a:gd name="adj" fmla="val 4132"/>
+              <a:gd name="adj" fmla="val 3933"/>
             </a:avLst>
           </a:prstGeom>
           <a:solidFill>
@@ -10031,7 +11372,7 @@
         <p:spPr>
           <a:xfrm>
             <a:off x="812800" y="1960879"/>
-            <a:ext cx="3386614" cy="2458720"/>
+            <a:ext cx="3386614" cy="2583180"/>
           </a:xfrm>
           <a:custGeom>
             <a:avLst/>
@@ -10040,7 +11381,7 @@
             <a:cxnLst/>
             <a:rect l="l" t="t" r="r" b="b"/>
             <a:pathLst>
-              <a:path w="3386614" h="2458720">
+              <a:path w="3386614" h="2583180">
                 <a:moveTo>
                   <a:pt x="0" y="101600"/>
                 </a:moveTo>
@@ -10145,8 +11486,8 @@
         </p:nvSpPr>
         <p:spPr>
           <a:xfrm>
-            <a:off x="1145032" y="2672079"/>
-            <a:ext cx="2879120" cy="1518920"/>
+            <a:off x="1152144" y="2672079"/>
+            <a:ext cx="2872008" cy="1643380"/>
           </a:xfrm>
           <a:prstGeom prst="rect">
             <a:avLst/>
@@ -10160,15 +11501,15 @@
           </a:bodyPr>
           <a:lstStyle/>
           <a:p>
-            <a:pPr algn="l" marL="175768" indent="-175768">
-              <a:lnSpc>
-                <a:spcPts val="1960"/>
+            <a:pPr algn="l" marL="168656" indent="-168656">
+              <a:lnSpc>
+                <a:spcPts val="1820"/>
               </a:lnSpc>
               <a:buSzPct val="100000"/>
               <a:buChar char="•"/>
             </a:pPr>
             <a:r>
-              <a:rPr lang="en-US" sz="1400" dirty="0">
+              <a:rPr lang="en-US" sz="1300" dirty="0">
                 <a:solidFill>
                   <a:srgbClr val="4A5568"/>
                 </a:solidFill>
@@ -10176,20 +11517,20 @@
                 <a:ea typeface="IBM Plex Sans" pitchFamily="34" charset="-122"/>
                 <a:cs typeface="IBM Plex Sans" pitchFamily="34" charset="-120"/>
               </a:rPr>
-              <a:t>Repo and Git LFS set up</a:t>
-            </a:r>
-            <a:endParaRPr lang="en-US" sz="1400" dirty="0"/>
-          </a:p>
-          <a:p>
-            <a:pPr algn="l" marL="175768" indent="-175768">
-              <a:lnSpc>
-                <a:spcPts val="1960"/>
+              <a:t>Filtered to 2023–2025 (410,865 loans)</a:t>
+            </a:r>
+            <a:endParaRPr lang="en-US" sz="1300" dirty="0"/>
+          </a:p>
+          <a:p>
+            <a:pPr algn="l" marL="168656" indent="-168656">
+              <a:lnSpc>
+                <a:spcPts val="1820"/>
               </a:lnSpc>
               <a:buSzPct val="100000"/>
               <a:buChar char="•"/>
             </a:pPr>
             <a:r>
-              <a:rPr lang="en-US" sz="1400" dirty="0">
+              <a:rPr lang="en-US" sz="1300" dirty="0">
                 <a:solidFill>
                   <a:srgbClr val="4A5568"/>
                 </a:solidFill>
@@ -10197,20 +11538,20 @@
                 <a:ea typeface="IBM Plex Sans" pitchFamily="34" charset="-122"/>
                 <a:cs typeface="IBM Plex Sans" pitchFamily="34" charset="-120"/>
               </a:rPr>
-              <a:t>Data loaded, types fixed</a:t>
-            </a:r>
-            <a:endParaRPr lang="en-US" sz="1400" dirty="0"/>
-          </a:p>
-          <a:p>
-            <a:pPr algn="l" marL="175768" indent="-175768">
-              <a:lnSpc>
-                <a:spcPts val="1960"/>
+              <a:t>Missing values explained for all 21 columns</a:t>
+            </a:r>
+            <a:endParaRPr lang="en-US" sz="1300" dirty="0"/>
+          </a:p>
+          <a:p>
+            <a:pPr algn="l" marL="168656" indent="-168656">
+              <a:lnSpc>
+                <a:spcPts val="1820"/>
               </a:lnSpc>
               <a:buSzPct val="100000"/>
               <a:buChar char="•"/>
             </a:pPr>
             <a:r>
-              <a:rPr lang="en-US" sz="1400" dirty="0">
+              <a:rPr lang="en-US" sz="1300" dirty="0">
                 <a:solidFill>
                   <a:srgbClr val="4A5568"/>
                 </a:solidFill>
@@ -10218,20 +11559,20 @@
                 <a:ea typeface="IBM Plex Sans" pitchFamily="34" charset="-122"/>
                 <a:cs typeface="IBM Plex Sans" pitchFamily="34" charset="-120"/>
               </a:rPr>
-              <a:t>Missing values analysed per column</a:t>
-            </a:r>
-            <a:endParaRPr lang="en-US" sz="1400" dirty="0"/>
-          </a:p>
-          <a:p>
-            <a:pPr algn="l" marL="175768" indent="-175768">
-              <a:lnSpc>
-                <a:spcPts val="1960"/>
+              <a:t>Cancelled loans kept and flagged</a:t>
+            </a:r>
+            <a:endParaRPr lang="en-US" sz="1300" dirty="0"/>
+          </a:p>
+          <a:p>
+            <a:pPr algn="l" marL="168656" indent="-168656">
+              <a:lnSpc>
+                <a:spcPts val="1820"/>
               </a:lnSpc>
               <a:buSzPct val="100000"/>
               <a:buChar char="•"/>
             </a:pPr>
             <a:r>
-              <a:rPr lang="en-US" sz="1400" dirty="0">
+              <a:rPr lang="en-US" sz="1300" dirty="0">
                 <a:solidFill>
                   <a:srgbClr val="4A5568"/>
                 </a:solidFill>
@@ -10239,9 +11580,9 @@
                 <a:ea typeface="IBM Plex Sans" pitchFamily="34" charset="-122"/>
                 <a:cs typeface="IBM Plex Sans" pitchFamily="34" charset="-120"/>
               </a:rPr>
-              <a:t>README, data dictionary, cleaning log</a:t>
-            </a:r>
-            <a:endParaRPr lang="en-US" sz="1400" dirty="0"/>
+              <a:t>Default rate 13.7%, 12-month 9.1%</a:t>
+            </a:r>
+            <a:endParaRPr lang="en-US" sz="1300" dirty="0"/>
           </a:p>
         </p:txBody>
       </p:sp>
@@ -10254,11 +11595,11 @@
         <p:spPr>
           <a:xfrm>
             <a:off x="4402614" y="1960879"/>
-            <a:ext cx="3386693" cy="2458720"/>
+            <a:ext cx="3386693" cy="2583180"/>
           </a:xfrm>
           <a:prstGeom prst="roundRect">
             <a:avLst>
-              <a:gd name="adj" fmla="val 4132"/>
+              <a:gd name="adj" fmla="val 3933"/>
             </a:avLst>
           </a:prstGeom>
           <a:solidFill>
@@ -10276,7 +11617,7 @@
         <p:spPr>
           <a:xfrm>
             <a:off x="4402614" y="1960879"/>
-            <a:ext cx="3386693" cy="2458720"/>
+            <a:ext cx="3386693" cy="2583180"/>
           </a:xfrm>
           <a:custGeom>
             <a:avLst/>
@@ -10285,7 +11626,7 @@
             <a:cxnLst/>
             <a:rect l="l" t="t" r="r" b="b"/>
             <a:pathLst>
-              <a:path w="3386693" h="2458720">
+              <a:path w="3386693" h="2583180">
                 <a:moveTo>
                   <a:pt x="0" y="101600"/>
                 </a:moveTo>
@@ -10390,8 +11731,8 @@
         </p:nvSpPr>
         <p:spPr>
           <a:xfrm>
-            <a:off x="4734846" y="2672079"/>
-            <a:ext cx="2879202" cy="1270000"/>
+            <a:off x="4741958" y="2672079"/>
+            <a:ext cx="2872090" cy="949960"/>
           </a:xfrm>
           <a:prstGeom prst="rect">
             <a:avLst/>
@@ -10405,15 +11746,15 @@
           </a:bodyPr>
           <a:lstStyle/>
           <a:p>
-            <a:pPr algn="l" marL="175768" indent="-175768">
-              <a:lnSpc>
-                <a:spcPts val="1960"/>
+            <a:pPr algn="l" marL="168656" indent="-168656">
+              <a:lnSpc>
+                <a:spcPts val="1820"/>
               </a:lnSpc>
               <a:buSzPct val="100000"/>
               <a:buChar char="•"/>
             </a:pPr>
             <a:r>
-              <a:rPr lang="en-US" sz="1400" dirty="0">
+              <a:rPr lang="en-US" sz="1300" dirty="0">
                 <a:solidFill>
                   <a:srgbClr val="4A5568"/>
                 </a:solidFill>
@@ -10421,20 +11762,20 @@
                 <a:ea typeface="IBM Plex Sans" pitchFamily="34" charset="-122"/>
                 <a:cs typeface="IBM Plex Sans" pitchFamily="34" charset="-120"/>
               </a:rPr>
-              <a:t>Decide on the 7,713 cancelled loans</a:t>
-            </a:r>
-            <a:endParaRPr lang="en-US" sz="1400" dirty="0"/>
-          </a:p>
-          <a:p>
-            <a:pPr algn="l" marL="175768" indent="-175768">
-              <a:lnSpc>
-                <a:spcPts val="1960"/>
+              <a:t>Default rate by country, income, amount, rate, duration</a:t>
+            </a:r>
+            <a:endParaRPr lang="en-US" sz="1300" dirty="0"/>
+          </a:p>
+          <a:p>
+            <a:pPr algn="l" marL="168656" indent="-168656">
+              <a:lnSpc>
+                <a:spcPts val="1820"/>
               </a:lnSpc>
               <a:buSzPct val="100000"/>
               <a:buChar char="•"/>
             </a:pPr>
             <a:r>
-              <a:rPr lang="en-US" sz="1400" dirty="0">
+              <a:rPr lang="en-US" sz="1300" dirty="0">
                 <a:solidFill>
                   <a:srgbClr val="4A5568"/>
                 </a:solidFill>
@@ -10442,20 +11783,20 @@
                 <a:ea typeface="IBM Plex Sans" pitchFamily="34" charset="-122"/>
                 <a:cs typeface="IBM Plex Sans" pitchFamily="34" charset="-120"/>
               </a:rPr>
-              <a:t>Rebuild the default flag</a:t>
-            </a:r>
-            <a:endParaRPr lang="en-US" sz="1400" dirty="0"/>
-          </a:p>
-          <a:p>
-            <a:pPr algn="l" marL="175768" indent="-175768">
-              <a:lnSpc>
-                <a:spcPts val="1960"/>
+              <a:t>Charts in seaborn and Tableau</a:t>
+            </a:r>
+            <a:endParaRPr lang="en-US" sz="1300" dirty="0"/>
+          </a:p>
+          <a:p>
+            <a:pPr algn="l" marL="168656" indent="-168656">
+              <a:lnSpc>
+                <a:spcPts val="1820"/>
               </a:lnSpc>
               <a:buSzPct val="100000"/>
               <a:buChar char="•"/>
             </a:pPr>
             <a:r>
-              <a:rPr lang="en-US" sz="1400" dirty="0">
+              <a:rPr lang="en-US" sz="1300" dirty="0">
                 <a:solidFill>
                   <a:srgbClr val="4A5568"/>
                 </a:solidFill>
@@ -10463,9 +11804,9 @@
                 <a:ea typeface="IBM Plex Sans" pitchFamily="34" charset="-122"/>
                 <a:cs typeface="IBM Plex Sans" pitchFamily="34" charset="-120"/>
               </a:rPr>
-              <a:t>Default rate by segment, with charts</a:t>
-            </a:r>
-            <a:endParaRPr lang="en-US" sz="1400" dirty="0"/>
+              <a:t>Load clean data into SQL</a:t>
+            </a:r>
+            <a:endParaRPr lang="en-US" sz="1300" dirty="0"/>
           </a:p>
         </p:txBody>
       </p:sp>
@@ -10478,11 +11819,11 @@
         <p:spPr>
           <a:xfrm>
             <a:off x="7992507" y="1960879"/>
-            <a:ext cx="3386693" cy="2458720"/>
+            <a:ext cx="3386693" cy="2583180"/>
           </a:xfrm>
           <a:prstGeom prst="roundRect">
             <a:avLst>
-              <a:gd name="adj" fmla="val 4132"/>
+              <a:gd name="adj" fmla="val 3933"/>
             </a:avLst>
           </a:prstGeom>
           <a:solidFill>
@@ -10500,7 +11841,7 @@
         <p:spPr>
           <a:xfrm>
             <a:off x="7992507" y="1960879"/>
-            <a:ext cx="3386693" cy="2458720"/>
+            <a:ext cx="3386693" cy="2583180"/>
           </a:xfrm>
           <a:custGeom>
             <a:avLst/>
@@ -10509,7 +11850,7 @@
             <a:cxnLst/>
             <a:rect l="l" t="t" r="r" b="b"/>
             <a:pathLst>
-              <a:path w="3386693" h="2458720">
+              <a:path w="3386693" h="2583180">
                 <a:moveTo>
                   <a:pt x="0" y="101600"/>
                 </a:moveTo>
@@ -10571,7 +11912,7 @@
         <p:spPr>
           <a:xfrm>
             <a:off x="8627507" y="2268221"/>
-            <a:ext cx="1103090" cy="299720"/>
+            <a:ext cx="1983486" cy="299720"/>
           </a:xfrm>
           <a:prstGeom prst="rect">
             <a:avLst/>
@@ -10600,7 +11941,7 @@
                 <a:ea typeface="IBM Plex Sans" pitchFamily="34" charset="-122"/>
                 <a:cs typeface="IBM Plex Sans" pitchFamily="34" charset="-120"/>
               </a:rPr>
-              <a:t>Blockers</a:t>
+              <a:t>Open questions</a:t>
             </a:r>
             <a:endParaRPr lang="en-US" sz="1800" dirty="0"/>
           </a:p>
@@ -10614,8 +11955,8 @@
         </p:nvSpPr>
         <p:spPr>
           <a:xfrm>
-            <a:off x="8324739" y="2672079"/>
-            <a:ext cx="2879202" cy="1518920"/>
+            <a:off x="8331851" y="2672079"/>
+            <a:ext cx="2872090" cy="1181100"/>
           </a:xfrm>
           <a:prstGeom prst="rect">
             <a:avLst/>
@@ -10629,15 +11970,15 @@
           </a:bodyPr>
           <a:lstStyle/>
           <a:p>
-            <a:pPr algn="l" marL="175768" indent="-175768">
-              <a:lnSpc>
-                <a:spcPts val="1960"/>
+            <a:pPr algn="l" marL="168656" indent="-168656">
+              <a:lnSpc>
+                <a:spcPts val="1820"/>
               </a:lnSpc>
               <a:buSzPct val="100000"/>
               <a:buChar char="•"/>
             </a:pPr>
             <a:r>
-              <a:rPr lang="en-US" sz="1400" dirty="0">
+              <a:rPr lang="en-US" sz="1300" dirty="0">
                 <a:solidFill>
                   <a:srgbClr val="4A5568"/>
                 </a:solidFill>
@@ -10645,20 +11986,20 @@
                 <a:ea typeface="IBM Plex Sans" pitchFamily="34" charset="-122"/>
                 <a:cs typeface="IBM Plex Sans" pitchFamily="34" charset="-120"/>
               </a:rPr>
-              <a:t>Merge conflicts from a shared notebook and Parquet file</a:t>
-            </a:r>
-            <a:endParaRPr lang="en-US" sz="1400" dirty="0"/>
-          </a:p>
-          <a:p>
-            <a:pPr algn="l" marL="175768" indent="-175768">
-              <a:lnSpc>
-                <a:spcPts val="1960"/>
+              <a:t>Should 14,185 written-off loans count as defaults?</a:t>
+            </a:r>
+            <a:endParaRPr lang="en-US" sz="1300" dirty="0"/>
+          </a:p>
+          <a:p>
+            <a:pPr algn="l" marL="168656" indent="-168656">
+              <a:lnSpc>
+                <a:spcPts val="1820"/>
               </a:lnSpc>
               <a:buSzPct val="100000"/>
               <a:buChar char="•"/>
             </a:pPr>
             <a:r>
-              <a:rPr lang="en-US" sz="1400" dirty="0">
+              <a:rPr lang="en-US" sz="1300" dirty="0">
                 <a:solidFill>
                   <a:srgbClr val="4A5568"/>
                 </a:solidFill>
@@ -10666,20 +12007,20 @@
                 <a:ea typeface="IBM Plex Sans" pitchFamily="34" charset="-122"/>
                 <a:cs typeface="IBM Plex Sans" pitchFamily="34" charset="-120"/>
               </a:rPr>
-              <a:t>Dataset swapped mid-cleaning, counts re-checked</a:t>
-            </a:r>
-            <a:endParaRPr lang="en-US" sz="1400" dirty="0"/>
-          </a:p>
-          <a:p>
-            <a:pPr algn="l" marL="175768" indent="-175768">
-              <a:lnSpc>
-                <a:spcPts val="1960"/>
+              <a:t>Two date columns mix dates with Excel numbers</a:t>
+            </a:r>
+            <a:endParaRPr lang="en-US" sz="1300" dirty="0"/>
+          </a:p>
+          <a:p>
+            <a:pPr algn="l" marL="168656" indent="-168656">
+              <a:lnSpc>
+                <a:spcPts val="1820"/>
               </a:lnSpc>
               <a:buSzPct val="100000"/>
               <a:buChar char="•"/>
             </a:pPr>
             <a:r>
-              <a:rPr lang="en-US" sz="1400" dirty="0">
+              <a:rPr lang="en-US" sz="1300" dirty="0">
                 <a:solidFill>
                   <a:srgbClr val="4A5568"/>
                 </a:solidFill>
@@ -10687,9 +12028,9 @@
                 <a:ea typeface="IBM Plex Sans" pitchFamily="34" charset="-122"/>
                 <a:cs typeface="IBM Plex Sans" pitchFamily="34" charset="-120"/>
               </a:rPr>
-              <a:t>Waiting on mentor sign-off for missing values</a:t>
-            </a:r>
-            <a:endParaRPr lang="en-US" sz="1400" dirty="0"/>
+              <a:t>HR rating has only 19 loans</a:t>
+            </a:r>
+            <a:endParaRPr lang="en-US" sz="1300" dirty="0"/>
           </a:p>
         </p:txBody>
       </p:sp>
@@ -10701,7 +12042,7 @@
         </p:nvSpPr>
         <p:spPr>
           <a:xfrm>
-            <a:off x="812800" y="4724400"/>
+            <a:off x="812800" y="4848864"/>
             <a:ext cx="10883392" cy="274320"/>
           </a:xfrm>
           <a:prstGeom prst="rect">
@@ -10742,7 +12083,7 @@
                 <a:ea typeface="IBM Plex Sans" pitchFamily="34" charset="-122"/>
                 <a:cs typeface="IBM Plex Sans" pitchFamily="34" charset="-120"/>
               </a:rPr>
-              <a:t> missing-values table in the notebook · changes.md cleaning log · GitHub commit history</a:t>
+              <a:t> missing-value summary in analysis.ipynb · changes.md · README KPI table · GitHub history</a:t>
             </a:r>
             <a:endParaRPr lang="en-US" sz="1400" dirty="0"/>
           </a:p>
@@ -10873,10 +12214,10 @@
         <a:srgbClr val="4A5568"/>
       </a:accent4>
       <a:accent5>
-        <a:srgbClr val="6B7280"/>
+        <a:srgbClr val="D5DBE7"/>
       </a:accent5>
       <a:accent6>
-        <a:srgbClr val="5B6270"/>
+        <a:srgbClr val="6B7280"/>
       </a:accent6>
       <a:hlink>
         <a:srgbClr val="0563C1"/>
